--- a/kasrah-plus/01-alif.pptx
+++ b/kasrah-plus/01-alif.pptx
@@ -3430,7 +3430,7 @@
       </p:sp>
       <p:pic>
         <p:nvPicPr>
-          <p:cNvPr id="14" name="Image 0" descr="bird">    </p:cNvPr>
+          <p:cNvPr id="14" name="Image 0" descr="baby_chick">    </p:cNvPr>
           <p:cNvPicPr>
             <a:picLocks noChangeAspect="1"/>
           </p:cNvPicPr>
@@ -3443,9 +3443,9 @@
           </a:stretch>
         </p:blipFill>
         <p:spPr>
-          <a:xfrm>
-            <a:off x="91440" y="1783080"/>
-            <a:ext cx="1378824" cy="1554480"/>
+          <a:xfrm flipH="1">
+            <a:off x="91440" y="1828800"/>
+            <a:ext cx="1575694" cy="1463040"/>
           </a:xfrm>
           <a:prstGeom prst="rect">
             <a:avLst/>
@@ -3454,7 +3454,7 @@
       </p:pic>
       <p:pic>
         <p:nvPicPr>
-          <p:cNvPr id="15" name="Image 1" descr="duck">    </p:cNvPr>
+          <p:cNvPr id="15" name="Image 1" descr="chipmunk">    </p:cNvPr>
           <p:cNvPicPr>
             <a:picLocks noChangeAspect="1"/>
           </p:cNvPicPr>
@@ -3468,8 +3468,8 @@
         </p:blipFill>
         <p:spPr>
           <a:xfrm>
-            <a:off x="7737470" y="1783080"/>
-            <a:ext cx="1315090" cy="1554480"/>
+            <a:off x="7535388" y="1828800"/>
+            <a:ext cx="1517172" cy="1463040"/>
           </a:xfrm>
           <a:prstGeom prst="rect">
             <a:avLst/>
@@ -3478,7 +3478,7 @@
       </p:pic>
       <p:pic>
         <p:nvPicPr>
-          <p:cNvPr id="16" name="Image 2" descr="bee">    </p:cNvPr>
+          <p:cNvPr id="16" name="Image 2" descr="bird">    </p:cNvPr>
           <p:cNvPicPr>
             <a:picLocks noChangeAspect="1"/>
           </p:cNvPicPr>
@@ -3492,8 +3492,8 @@
         </p:blipFill>
         <p:spPr>
           <a:xfrm>
-            <a:off x="5507248" y="45720"/>
-            <a:ext cx="802112" cy="777240"/>
+            <a:off x="5567096" y="45720"/>
+            <a:ext cx="742264" cy="777240"/>
           </a:xfrm>
           <a:prstGeom prst="rect">
             <a:avLst/>
@@ -4527,7 +4527,7 @@
       </p:sp>
       <p:pic>
         <p:nvPicPr>
-          <p:cNvPr id="32" name="Image 0" descr="bird4">    </p:cNvPr>
+          <p:cNvPr id="32" name="Image 0" descr="lady_beetle">    </p:cNvPr>
           <p:cNvPicPr>
             <a:picLocks noChangeAspect="1"/>
           </p:cNvPicPr>
@@ -4542,7 +4542,7 @@
         <p:spPr>
           <a:xfrm>
             <a:off x="1005840" y="45720"/>
-            <a:ext cx="1007303" cy="777240"/>
+            <a:ext cx="780349" cy="777240"/>
           </a:xfrm>
           <a:prstGeom prst="rect">
             <a:avLst/>
@@ -5940,7 +5940,7 @@
       </p:sp>
       <p:pic>
         <p:nvPicPr>
-          <p:cNvPr id="29" name="Image 0" descr="rabbit">    </p:cNvPr>
+          <p:cNvPr id="29" name="Image 0" descr="flamingo">    </p:cNvPr>
           <p:cNvPicPr>
             <a:picLocks noChangeAspect="1"/>
           </p:cNvPicPr>
@@ -5953,9 +5953,9 @@
           </a:stretch>
         </p:blipFill>
         <p:spPr>
-          <a:xfrm>
-            <a:off x="91440" y="3840480"/>
-            <a:ext cx="923361" cy="1234440"/>
+          <a:xfrm flipH="1">
+            <a:off x="91440" y="3881628"/>
+            <a:ext cx="928390" cy="1188720"/>
           </a:xfrm>
           <a:prstGeom prst="rect">
             <a:avLst/>
@@ -5964,7 +5964,7 @@
       </p:pic>
       <p:pic>
         <p:nvPicPr>
-          <p:cNvPr id="30" name="Image 1" descr="duck">    </p:cNvPr>
+          <p:cNvPr id="30" name="Image 1" descr="bird">    </p:cNvPr>
           <p:cNvPicPr>
             <a:picLocks noChangeAspect="1"/>
           </p:cNvPicPr>
@@ -5978,32 +5978,8 @@
         </p:blipFill>
         <p:spPr>
           <a:xfrm>
-            <a:off x="8493724" y="4297680"/>
-            <a:ext cx="558836" cy="777240"/>
-          </a:xfrm>
-          <a:prstGeom prst="rect">
-            <a:avLst/>
-          </a:prstGeom>
-        </p:spPr>
-      </p:pic>
-      <p:pic>
-        <p:nvPicPr>
-          <p:cNvPr id="31" name="Image 2" descr="bee">    </p:cNvPr>
-          <p:cNvPicPr>
-            <a:picLocks noChangeAspect="1"/>
-          </p:cNvPicPr>
-          <p:nvPr/>
-        </p:nvPicPr>
-        <p:blipFill>
-          <a:blip r:embed="rId3"/>
-          <a:stretch>
-            <a:fillRect/>
-          </a:stretch>
-        </p:blipFill>
-        <p:spPr>
-          <a:xfrm>
-            <a:off x="5507248" y="45720"/>
-            <a:ext cx="802112" cy="777240"/>
+            <a:off x="5567096" y="45720"/>
+            <a:ext cx="742264" cy="777240"/>
           </a:xfrm>
           <a:prstGeom prst="rect">
             <a:avLst/>
@@ -7274,7 +7250,7 @@
       </p:sp>
       <p:pic>
         <p:nvPicPr>
-          <p:cNvPr id="24" name="Image 0" descr="fish">    </p:cNvPr>
+          <p:cNvPr id="24" name="Image 0" descr="kangaroo">    </p:cNvPr>
           <p:cNvPicPr>
             <a:picLocks noChangeAspect="1"/>
           </p:cNvPicPr>
@@ -7288,8 +7264,8 @@
         </p:blipFill>
         <p:spPr>
           <a:xfrm>
-            <a:off x="91440" y="3566160"/>
-            <a:ext cx="1875389" cy="1508760"/>
+            <a:off x="91440" y="3561588"/>
+            <a:ext cx="1617391" cy="1508760"/>
           </a:xfrm>
           <a:prstGeom prst="rect">
             <a:avLst/>
@@ -7298,7 +7274,7 @@
       </p:pic>
       <p:pic>
         <p:nvPicPr>
-          <p:cNvPr id="25" name="Image 1" descr="duck">    </p:cNvPr>
+          <p:cNvPr id="25" name="Image 1" descr="cat">    </p:cNvPr>
           <p:cNvPicPr>
             <a:picLocks noChangeAspect="1"/>
           </p:cNvPicPr>
@@ -7312,8 +7288,8 @@
         </p:blipFill>
         <p:spPr>
           <a:xfrm>
-            <a:off x="7806873" y="3337560"/>
-            <a:ext cx="1245687" cy="1737360"/>
+            <a:off x="7250918" y="3332988"/>
+            <a:ext cx="1801642" cy="1737360"/>
           </a:xfrm>
           <a:prstGeom prst="rect">
             <a:avLst/>
@@ -7322,7 +7298,7 @@
       </p:pic>
       <p:pic>
         <p:nvPicPr>
-          <p:cNvPr id="26" name="Image 2" descr="bird2">    </p:cNvPr>
+          <p:cNvPr id="26" name="Image 2" descr="butterfly">    </p:cNvPr>
           <p:cNvPicPr>
             <a:picLocks noChangeAspect="1"/>
           </p:cNvPicPr>
@@ -7337,7 +7313,7 @@
         <p:spPr>
           <a:xfrm>
             <a:off x="1920240" y="45720"/>
-            <a:ext cx="918789" cy="731520"/>
+            <a:ext cx="777240" cy="777240"/>
           </a:xfrm>
           <a:prstGeom prst="rect">
             <a:avLst/>
@@ -8633,7 +8609,7 @@
       </p:sp>
       <p:pic>
         <p:nvPicPr>
-          <p:cNvPr id="25" name="Image 0" descr="elephant">    </p:cNvPr>
+          <p:cNvPr id="25" name="Image 0" descr="rabbit">    </p:cNvPr>
           <p:cNvPicPr>
             <a:picLocks noChangeAspect="1"/>
           </p:cNvPicPr>
@@ -8646,9 +8622,9 @@
           </a:stretch>
         </p:blipFill>
         <p:spPr>
-          <a:xfrm>
-            <a:off x="91440" y="4069080"/>
-            <a:ext cx="1108436" cy="1005840"/>
+          <a:xfrm flipH="1">
+            <a:off x="91440" y="3973068"/>
+            <a:ext cx="1101669" cy="1097280"/>
           </a:xfrm>
           <a:prstGeom prst="rect">
             <a:avLst/>
@@ -8657,7 +8633,7 @@
       </p:pic>
       <p:pic>
         <p:nvPicPr>
-          <p:cNvPr id="26" name="Image 1" descr="turtle">    </p:cNvPr>
+          <p:cNvPr id="26" name="Image 1" descr="parrot">    </p:cNvPr>
           <p:cNvPicPr>
             <a:picLocks noChangeAspect="1"/>
           </p:cNvPicPr>
@@ -8671,8 +8647,8 @@
         </p:blipFill>
         <p:spPr>
           <a:xfrm>
-            <a:off x="8341523" y="4343400"/>
-            <a:ext cx="711037" cy="731520"/>
+            <a:off x="8343168" y="4247388"/>
+            <a:ext cx="709392" cy="822960"/>
           </a:xfrm>
           <a:prstGeom prst="rect">
             <a:avLst/>
@@ -8681,7 +8657,7 @@
       </p:pic>
       <p:pic>
         <p:nvPicPr>
-          <p:cNvPr id="27" name="Image 2" descr="butterfly1">    </p:cNvPr>
+          <p:cNvPr id="27" name="Image 2" descr="dove">    </p:cNvPr>
           <p:cNvPicPr>
             <a:picLocks noChangeAspect="1"/>
           </p:cNvPicPr>
@@ -8695,8 +8671,8 @@
         </p:blipFill>
         <p:spPr>
           <a:xfrm>
-            <a:off x="5403098" y="45720"/>
-            <a:ext cx="906262" cy="777240"/>
+            <a:off x="5535229" y="45720"/>
+            <a:ext cx="774131" cy="777240"/>
           </a:xfrm>
           <a:prstGeom prst="rect">
             <a:avLst/>
@@ -10017,7 +9993,7 @@
       </p:sp>
       <p:pic>
         <p:nvPicPr>
-          <p:cNvPr id="26" name="Image 0" descr="duck">    </p:cNvPr>
+          <p:cNvPr id="26" name="Image 0" descr="camel">    </p:cNvPr>
           <p:cNvPicPr>
             <a:picLocks noChangeAspect="1"/>
           </p:cNvPicPr>
@@ -10030,9 +10006,9 @@
           </a:stretch>
         </p:blipFill>
         <p:spPr>
-          <a:xfrm>
-            <a:off x="91440" y="3566160"/>
-            <a:ext cx="1274902" cy="1508760"/>
+          <a:xfrm flipH="1">
+            <a:off x="91440" y="3561588"/>
+            <a:ext cx="1564584" cy="1508760"/>
           </a:xfrm>
           <a:prstGeom prst="rect">
             <a:avLst/>
@@ -10041,7 +10017,7 @@
       </p:pic>
       <p:pic>
         <p:nvPicPr>
-          <p:cNvPr id="27" name="Image 1" descr="turtle">    </p:cNvPr>
+          <p:cNvPr id="27" name="Image 1" descr="flamingo">    </p:cNvPr>
           <p:cNvPicPr>
             <a:picLocks noChangeAspect="1"/>
           </p:cNvPicPr>
@@ -10055,8 +10031,8 @@
         </p:blipFill>
         <p:spPr>
           <a:xfrm>
-            <a:off x="7257867" y="3337560"/>
-            <a:ext cx="1794693" cy="1737360"/>
+            <a:off x="7695682" y="3332988"/>
+            <a:ext cx="1356878" cy="1737360"/>
           </a:xfrm>
           <a:prstGeom prst="rect">
             <a:avLst/>
@@ -11337,7 +11313,7 @@
       </p:sp>
       <p:pic>
         <p:nvPicPr>
-          <p:cNvPr id="24" name="Image 0" descr="dog">    </p:cNvPr>
+          <p:cNvPr id="24" name="Image 0" descr="duck">    </p:cNvPr>
           <p:cNvPicPr>
             <a:picLocks noChangeAspect="1"/>
           </p:cNvPicPr>
@@ -11350,9 +11326,9 @@
           </a:stretch>
         </p:blipFill>
         <p:spPr>
-          <a:xfrm>
-            <a:off x="91440" y="3566160"/>
-            <a:ext cx="1425778" cy="1508760"/>
+          <a:xfrm flipH="1">
+            <a:off x="91440" y="3561588"/>
+            <a:ext cx="1508760" cy="1508760"/>
           </a:xfrm>
           <a:prstGeom prst="rect">
             <a:avLst/>
@@ -11361,7 +11337,7 @@
       </p:pic>
       <p:pic>
         <p:nvPicPr>
-          <p:cNvPr id="25" name="Image 1" descr="turtle">    </p:cNvPr>
+          <p:cNvPr id="25" name="Image 1" descr="swan">    </p:cNvPr>
           <p:cNvPicPr>
             <a:picLocks noChangeAspect="1"/>
           </p:cNvPicPr>
@@ -11375,8 +11351,8 @@
         </p:blipFill>
         <p:spPr>
           <a:xfrm>
-            <a:off x="7497623" y="3337560"/>
-            <a:ext cx="1554937" cy="1737360"/>
+            <a:off x="7181423" y="3332988"/>
+            <a:ext cx="1871137" cy="1737360"/>
           </a:xfrm>
           <a:prstGeom prst="rect">
             <a:avLst/>
@@ -11385,7 +11361,7 @@
       </p:pic>
       <p:pic>
         <p:nvPicPr>
-          <p:cNvPr id="26" name="Image 2" descr="bird4">    </p:cNvPr>
+          <p:cNvPr id="26" name="Image 2" descr="lady_beetle">    </p:cNvPr>
           <p:cNvPicPr>
             <a:picLocks noChangeAspect="1"/>
           </p:cNvPicPr>
@@ -11398,9 +11374,9 @@
           </a:stretch>
         </p:blipFill>
         <p:spPr>
-          <a:xfrm flipH="1">
-            <a:off x="6216457" y="45720"/>
-            <a:ext cx="1007303" cy="777240"/>
+          <a:xfrm>
+            <a:off x="6443411" y="45720"/>
+            <a:ext cx="780349" cy="777240"/>
           </a:xfrm>
           <a:prstGeom prst="rect">
             <a:avLst/>
@@ -12743,7 +12719,7 @@
       </p:sp>
       <p:pic>
         <p:nvPicPr>
-          <p:cNvPr id="28" name="Image 0" descr="bee">    </p:cNvPr>
+          <p:cNvPr id="28" name="Image 0" descr="bird">    </p:cNvPr>
           <p:cNvPicPr>
             <a:picLocks noChangeAspect="1"/>
           </p:cNvPicPr>
@@ -12756,9 +12732,9 @@
           </a:stretch>
         </p:blipFill>
         <p:spPr>
-          <a:xfrm>
+          <a:xfrm flipH="1">
             <a:off x="1005840" y="45720"/>
-            <a:ext cx="802112" cy="777240"/>
+            <a:ext cx="742264" cy="777240"/>
           </a:xfrm>
           <a:prstGeom prst="rect">
             <a:avLst/>
@@ -13866,7 +13842,7 @@
       </p:sp>
       <p:pic>
         <p:nvPicPr>
-          <p:cNvPr id="25" name="Image 0" descr="bird">    </p:cNvPr>
+          <p:cNvPr id="25" name="Image 0" descr="peacock">    </p:cNvPr>
           <p:cNvPicPr>
             <a:picLocks noChangeAspect="1"/>
           </p:cNvPicPr>
@@ -13880,8 +13856,8 @@
         </p:blipFill>
         <p:spPr>
           <a:xfrm>
-            <a:off x="91440" y="4069080"/>
-            <a:ext cx="892180" cy="1005840"/>
+            <a:off x="91440" y="4201668"/>
+            <a:ext cx="926882" cy="868680"/>
           </a:xfrm>
           <a:prstGeom prst="rect">
             <a:avLst/>
@@ -13890,7 +13866,7 @@
       </p:pic>
       <p:pic>
         <p:nvPicPr>
-          <p:cNvPr id="26" name="Image 1" descr="bird2">    </p:cNvPr>
+          <p:cNvPr id="26" name="Image 1" descr="butterfly">    </p:cNvPr>
           <p:cNvPicPr>
             <a:picLocks noChangeAspect="1"/>
           </p:cNvPicPr>
@@ -13903,9 +13879,9 @@
           </a:stretch>
         </p:blipFill>
         <p:spPr>
-          <a:xfrm flipH="1">
-            <a:off x="5505420" y="45720"/>
-            <a:ext cx="803940" cy="640080"/>
+          <a:xfrm>
+            <a:off x="5532120" y="45720"/>
+            <a:ext cx="777240" cy="777240"/>
           </a:xfrm>
           <a:prstGeom prst="rect">
             <a:avLst/>
@@ -14886,7 +14862,7 @@
       </p:sp>
       <p:pic>
         <p:nvPicPr>
-          <p:cNvPr id="20" name="Image 0" descr="turtle">    </p:cNvPr>
+          <p:cNvPr id="20" name="Image 0" descr="zebra">    </p:cNvPr>
           <p:cNvPicPr>
             <a:picLocks noChangeAspect="1"/>
           </p:cNvPicPr>
@@ -14900,8 +14876,8 @@
         </p:blipFill>
         <p:spPr>
           <a:xfrm>
-            <a:off x="91440" y="3657600"/>
-            <a:ext cx="1452753" cy="1417320"/>
+            <a:off x="91440" y="3653028"/>
+            <a:ext cx="1417320" cy="1417320"/>
           </a:xfrm>
           <a:prstGeom prst="rect">
             <a:avLst/>
@@ -14910,7 +14886,7 @@
       </p:pic>
       <p:pic>
         <p:nvPicPr>
-          <p:cNvPr id="21" name="Image 1" descr="duck">    </p:cNvPr>
+          <p:cNvPr id="21" name="Image 1" descr="snail">    </p:cNvPr>
           <p:cNvPicPr>
             <a:picLocks noChangeAspect="1"/>
           </p:cNvPicPr>
@@ -14923,9 +14899,9 @@
           </a:stretch>
         </p:blipFill>
         <p:spPr>
-          <a:xfrm>
-            <a:off x="7925562" y="3520440"/>
-            <a:ext cx="1126998" cy="1554480"/>
+          <a:xfrm flipH="1">
+            <a:off x="7470099" y="3515868"/>
+            <a:ext cx="1582461" cy="1554480"/>
           </a:xfrm>
           <a:prstGeom prst="rect">
             <a:avLst/>
@@ -14934,7 +14910,7 @@
       </p:pic>
       <p:pic>
         <p:nvPicPr>
-          <p:cNvPr id="22" name="Image 2" descr="butterfly1">    </p:cNvPr>
+          <p:cNvPr id="22" name="Image 2" descr="dove">    </p:cNvPr>
           <p:cNvPicPr>
             <a:picLocks noChangeAspect="1"/>
           </p:cNvPicPr>
@@ -14947,9 +14923,9 @@
           </a:stretch>
         </p:blipFill>
         <p:spPr>
-          <a:xfrm>
+          <a:xfrm flipH="1">
             <a:off x="1920240" y="45720"/>
-            <a:ext cx="906262" cy="777240"/>
+            <a:ext cx="774131" cy="777240"/>
           </a:xfrm>
           <a:prstGeom prst="rect">
             <a:avLst/>
@@ -15955,7 +15931,7 @@
       </p:sp>
       <p:pic>
         <p:nvPicPr>
-          <p:cNvPr id="21" name="Image 0" descr="rabbit">    </p:cNvPr>
+          <p:cNvPr id="21" name="Image 0" descr="dog">    </p:cNvPr>
           <p:cNvPicPr>
             <a:picLocks noChangeAspect="1"/>
           </p:cNvPicPr>
@@ -15968,9 +15944,9 @@
           </a:stretch>
         </p:blipFill>
         <p:spPr>
-          <a:xfrm>
-            <a:off x="91440" y="3657600"/>
-            <a:ext cx="1060155" cy="1417320"/>
+          <a:xfrm flipH="1">
+            <a:off x="91440" y="4110228"/>
+            <a:ext cx="1075334" cy="960120"/>
           </a:xfrm>
           <a:prstGeom prst="rect">
             <a:avLst/>
@@ -15979,7 +15955,7 @@
       </p:pic>
       <p:pic>
         <p:nvPicPr>
-          <p:cNvPr id="22" name="Image 1" descr="duck">    </p:cNvPr>
+          <p:cNvPr id="22" name="Image 1" descr="honeybee">    </p:cNvPr>
           <p:cNvPicPr>
             <a:picLocks noChangeAspect="1"/>
           </p:cNvPicPr>
@@ -15993,32 +15969,8 @@
         </p:blipFill>
         <p:spPr>
           <a:xfrm>
-            <a:off x="8329361" y="4069080"/>
-            <a:ext cx="723199" cy="1005840"/>
-          </a:xfrm>
-          <a:prstGeom prst="rect">
-            <a:avLst/>
-          </a:prstGeom>
-        </p:spPr>
-      </p:pic>
-      <p:pic>
-        <p:nvPicPr>
-          <p:cNvPr id="23" name="Image 2" descr="bird1">    </p:cNvPr>
-          <p:cNvPicPr>
-            <a:picLocks noChangeAspect="1"/>
-          </p:cNvPicPr>
-          <p:nvPr/>
-        </p:nvPicPr>
-        <p:blipFill>
-          <a:blip r:embed="rId3"/>
-          <a:stretch>
-            <a:fillRect/>
-          </a:stretch>
-        </p:blipFill>
-        <p:spPr>
-          <a:xfrm flipH="1">
-            <a:off x="5302057" y="45720"/>
-            <a:ext cx="1007303" cy="777240"/>
+            <a:off x="5483931" y="45720"/>
+            <a:ext cx="825429" cy="777240"/>
           </a:xfrm>
           <a:prstGeom prst="rect">
             <a:avLst/>
@@ -17049,7 +17001,7 @@
       </p:sp>
       <p:pic>
         <p:nvPicPr>
-          <p:cNvPr id="22" name="Image 0" descr="turtle">    </p:cNvPr>
+          <p:cNvPr id="22" name="Image 0" descr="duck">    </p:cNvPr>
           <p:cNvPicPr>
             <a:picLocks noChangeAspect="1"/>
           </p:cNvPicPr>
@@ -17062,9 +17014,9 @@
           </a:stretch>
         </p:blipFill>
         <p:spPr>
-          <a:xfrm>
-            <a:off x="91440" y="3657600"/>
-            <a:ext cx="1452753" cy="1417320"/>
+          <a:xfrm flipH="1">
+            <a:off x="91440" y="3653028"/>
+            <a:ext cx="1417320" cy="1417320"/>
           </a:xfrm>
           <a:prstGeom prst="rect">
             <a:avLst/>
@@ -17073,7 +17025,7 @@
       </p:pic>
       <p:pic>
         <p:nvPicPr>
-          <p:cNvPr id="23" name="Image 1" descr="duck">    </p:cNvPr>
+          <p:cNvPr id="23" name="Image 1" descr="peacock">    </p:cNvPr>
           <p:cNvPicPr>
             <a:picLocks noChangeAspect="1"/>
           </p:cNvPicPr>
@@ -17087,8 +17039,8 @@
         </p:blipFill>
         <p:spPr>
           <a:xfrm>
-            <a:off x="7925562" y="3520440"/>
-            <a:ext cx="1126998" cy="1554480"/>
+            <a:off x="7393930" y="3515868"/>
+            <a:ext cx="1658630" cy="1554480"/>
           </a:xfrm>
           <a:prstGeom prst="rect">
             <a:avLst/>
@@ -18119,7 +18071,7 @@
       </p:sp>
       <p:pic>
         <p:nvPicPr>
-          <p:cNvPr id="22" name="Image 0" descr="fish">    </p:cNvPr>
+          <p:cNvPr id="22" name="Image 0" descr="hatching_chick">    </p:cNvPr>
           <p:cNvPicPr>
             <a:picLocks noChangeAspect="1"/>
           </p:cNvPicPr>
@@ -18133,8 +18085,8 @@
         </p:blipFill>
         <p:spPr>
           <a:xfrm>
-            <a:off x="91440" y="3657600"/>
-            <a:ext cx="1761729" cy="1417320"/>
+            <a:off x="91440" y="3653028"/>
+            <a:ext cx="1417320" cy="1417320"/>
           </a:xfrm>
           <a:prstGeom prst="rect">
             <a:avLst/>
@@ -18143,7 +18095,7 @@
       </p:pic>
       <p:pic>
         <p:nvPicPr>
-          <p:cNvPr id="23" name="Image 1" descr="duck">    </p:cNvPr>
+          <p:cNvPr id="23" name="Image 1" descr="cow">    </p:cNvPr>
           <p:cNvPicPr>
             <a:picLocks noChangeAspect="1"/>
           </p:cNvPicPr>
@@ -18157,8 +18109,8 @@
         </p:blipFill>
         <p:spPr>
           <a:xfrm>
-            <a:off x="7937998" y="3520440"/>
-            <a:ext cx="1114562" cy="1554480"/>
+            <a:off x="7409475" y="3515868"/>
+            <a:ext cx="1643085" cy="1554480"/>
           </a:xfrm>
           <a:prstGeom prst="rect">
             <a:avLst/>
@@ -19149,7 +19101,7 @@
       </p:sp>
       <p:pic>
         <p:nvPicPr>
-          <p:cNvPr id="20" name="Image 0" descr="elephant">    </p:cNvPr>
+          <p:cNvPr id="20" name="Image 0" descr="crab">    </p:cNvPr>
           <p:cNvPicPr>
             <a:picLocks noChangeAspect="1"/>
           </p:cNvPicPr>
@@ -19163,8 +19115,8 @@
         </p:blipFill>
         <p:spPr>
           <a:xfrm>
-            <a:off x="91440" y="3657600"/>
-            <a:ext cx="1561887" cy="1417320"/>
+            <a:off x="91440" y="3653028"/>
+            <a:ext cx="1587398" cy="1417320"/>
           </a:xfrm>
           <a:prstGeom prst="rect">
             <a:avLst/>
@@ -19173,7 +19125,7 @@
       </p:pic>
       <p:pic>
         <p:nvPicPr>
-          <p:cNvPr id="21" name="Image 1" descr="turtle">    </p:cNvPr>
+          <p:cNvPr id="21" name="Image 1" descr="seal">    </p:cNvPr>
           <p:cNvPicPr>
             <a:picLocks noChangeAspect="1"/>
           </p:cNvPicPr>
@@ -19187,8 +19139,8 @@
         </p:blipFill>
         <p:spPr>
           <a:xfrm>
-            <a:off x="7541605" y="3520440"/>
-            <a:ext cx="1510955" cy="1554480"/>
+            <a:off x="7000646" y="3515868"/>
+            <a:ext cx="2051914" cy="1554480"/>
           </a:xfrm>
           <a:prstGeom prst="rect">
             <a:avLst/>
@@ -19197,7 +19149,7 @@
       </p:pic>
       <p:pic>
         <p:nvPicPr>
-          <p:cNvPr id="22" name="Image 2" descr="bee">    </p:cNvPr>
+          <p:cNvPr id="22" name="Image 2" descr="bird">    </p:cNvPr>
           <p:cNvPicPr>
             <a:picLocks noChangeAspect="1"/>
           </p:cNvPicPr>
@@ -19211,8 +19163,8 @@
         </p:blipFill>
         <p:spPr>
           <a:xfrm>
-            <a:off x="6421648" y="45720"/>
-            <a:ext cx="802112" cy="777240"/>
+            <a:off x="6481496" y="45720"/>
+            <a:ext cx="742264" cy="777240"/>
           </a:xfrm>
           <a:prstGeom prst="rect">
             <a:avLst/>
@@ -20393,7 +20345,7 @@
       </p:sp>
       <p:pic>
         <p:nvPicPr>
-          <p:cNvPr id="28" name="Image 0" descr="bird2">    </p:cNvPr>
+          <p:cNvPr id="28" name="Image 0" descr="butterfly">    </p:cNvPr>
           <p:cNvPicPr>
             <a:picLocks noChangeAspect="1"/>
           </p:cNvPicPr>
@@ -20408,7 +20360,7 @@
         <p:spPr>
           <a:xfrm>
             <a:off x="1005840" y="45720"/>
-            <a:ext cx="976213" cy="777240"/>
+            <a:ext cx="777240" cy="777240"/>
           </a:xfrm>
           <a:prstGeom prst="rect">
             <a:avLst/>
@@ -21417,7 +21369,7 @@
       </p:sp>
       <p:pic>
         <p:nvPicPr>
-          <p:cNvPr id="22" name="Image 0" descr="dog">    </p:cNvPr>
+          <p:cNvPr id="22" name="Image 0" descr="cow">    </p:cNvPr>
           <p:cNvPicPr>
             <a:picLocks noChangeAspect="1"/>
           </p:cNvPicPr>
@@ -21430,9 +21382,9 @@
           </a:stretch>
         </p:blipFill>
         <p:spPr>
-          <a:xfrm>
-            <a:off x="91440" y="1783080"/>
-            <a:ext cx="1468984" cy="1554480"/>
+          <a:xfrm flipH="1">
+            <a:off x="91440" y="1828800"/>
+            <a:ext cx="1546433" cy="1463040"/>
           </a:xfrm>
           <a:prstGeom prst="rect">
             <a:avLst/>
@@ -21441,7 +21393,7 @@
       </p:pic>
       <p:pic>
         <p:nvPicPr>
-          <p:cNvPr id="23" name="Image 1" descr="turtle">    </p:cNvPr>
+          <p:cNvPr id="23" name="Image 1" descr="camel">    </p:cNvPr>
           <p:cNvPicPr>
             <a:picLocks noChangeAspect="1"/>
           </p:cNvPicPr>
@@ -21455,8 +21407,8 @@
         </p:blipFill>
         <p:spPr>
           <a:xfrm>
-            <a:off x="7661300" y="1783080"/>
-            <a:ext cx="1391260" cy="1554480"/>
+            <a:off x="7535388" y="1828800"/>
+            <a:ext cx="1517172" cy="1463040"/>
           </a:xfrm>
           <a:prstGeom prst="rect">
             <a:avLst/>
@@ -21465,7 +21417,7 @@
       </p:pic>
       <p:pic>
         <p:nvPicPr>
-          <p:cNvPr id="24" name="Image 2" descr="butterfly1">    </p:cNvPr>
+          <p:cNvPr id="24" name="Image 2" descr="dove">    </p:cNvPr>
           <p:cNvPicPr>
             <a:picLocks noChangeAspect="1"/>
           </p:cNvPicPr>
@@ -21479,8 +21431,8 @@
         </p:blipFill>
         <p:spPr>
           <a:xfrm>
-            <a:off x="5456408" y="45720"/>
-            <a:ext cx="852952" cy="731520"/>
+            <a:off x="5535229" y="45720"/>
+            <a:ext cx="774131" cy="777240"/>
           </a:xfrm>
           <a:prstGeom prst="rect">
             <a:avLst/>
@@ -22290,7 +22242,7 @@
       </p:sp>
       <p:pic>
         <p:nvPicPr>
-          <p:cNvPr id="17" name="Image 0" descr="cat">    </p:cNvPr>
+          <p:cNvPr id="17" name="Image 0" descr="giraffe">    </p:cNvPr>
           <p:cNvPicPr>
             <a:picLocks noChangeAspect="1"/>
           </p:cNvPicPr>
@@ -22303,9 +22255,9 @@
           </a:stretch>
         </p:blipFill>
         <p:spPr>
-          <a:xfrm>
-            <a:off x="91440" y="1783080"/>
-            <a:ext cx="1322862" cy="1554480"/>
+          <a:xfrm flipH="1">
+            <a:off x="91440" y="1828800"/>
+            <a:ext cx="1372332" cy="1463040"/>
           </a:xfrm>
           <a:prstGeom prst="rect">
             <a:avLst/>
@@ -22314,7 +22266,7 @@
       </p:pic>
       <p:pic>
         <p:nvPicPr>
-          <p:cNvPr id="18" name="Image 1" descr="turtle">    </p:cNvPr>
+          <p:cNvPr id="18" name="Image 1" descr="owl">    </p:cNvPr>
           <p:cNvPicPr>
             <a:picLocks noChangeAspect="1"/>
           </p:cNvPicPr>
@@ -22328,8 +22280,8 @@
         </p:blipFill>
         <p:spPr>
           <a:xfrm>
-            <a:off x="7283562" y="1783080"/>
-            <a:ext cx="1768998" cy="1554480"/>
+            <a:off x="7902611" y="1828800"/>
+            <a:ext cx="1149949" cy="1463040"/>
           </a:xfrm>
           <a:prstGeom prst="rect">
             <a:avLst/>
@@ -22338,7 +22290,7 @@
       </p:pic>
       <p:pic>
         <p:nvPicPr>
-          <p:cNvPr id="19" name="Image 2" descr="bird1">    </p:cNvPr>
+          <p:cNvPr id="19" name="Image 2" descr="honeybee">    </p:cNvPr>
           <p:cNvPicPr>
             <a:picLocks noChangeAspect="1"/>
           </p:cNvPicPr>
@@ -22351,9 +22303,9 @@
           </a:stretch>
         </p:blipFill>
         <p:spPr>
-          <a:xfrm>
+          <a:xfrm flipH="1">
             <a:off x="1920240" y="45720"/>
-            <a:ext cx="888797" cy="685800"/>
+            <a:ext cx="825429" cy="777240"/>
           </a:xfrm>
           <a:prstGeom prst="rect">
             <a:avLst/>
@@ -23188,7 +23140,7 @@
       </p:sp>
       <p:pic>
         <p:nvPicPr>
-          <p:cNvPr id="18" name="Image 0" descr="bird">    </p:cNvPr>
+          <p:cNvPr id="18" name="Image 0" descr="llama">    </p:cNvPr>
           <p:cNvPicPr>
             <a:picLocks noChangeAspect="1"/>
           </p:cNvPicPr>
@@ -23201,9 +23153,9 @@
           </a:stretch>
         </p:blipFill>
         <p:spPr>
-          <a:xfrm>
-            <a:off x="91440" y="1783080"/>
-            <a:ext cx="1378824" cy="1554480"/>
+          <a:xfrm flipH="1">
+            <a:off x="91440" y="1828800"/>
+            <a:ext cx="1365016" cy="1463040"/>
           </a:xfrm>
           <a:prstGeom prst="rect">
             <a:avLst/>
@@ -23212,7 +23164,7 @@
       </p:pic>
       <p:pic>
         <p:nvPicPr>
-          <p:cNvPr id="19" name="Image 1" descr="duck">    </p:cNvPr>
+          <p:cNvPr id="19" name="Image 1" descr="ewe">    </p:cNvPr>
           <p:cNvPicPr>
             <a:picLocks noChangeAspect="1"/>
           </p:cNvPicPr>
@@ -23226,8 +23178,8 @@
         </p:blipFill>
         <p:spPr>
           <a:xfrm>
-            <a:off x="7737470" y="1783080"/>
-            <a:ext cx="1315090" cy="1554480"/>
+            <a:off x="7589520" y="1828800"/>
+            <a:ext cx="1463040" cy="1463040"/>
           </a:xfrm>
           <a:prstGeom prst="rect">
             <a:avLst/>
@@ -23236,7 +23188,7 @@
       </p:pic>
       <p:pic>
         <p:nvPicPr>
-          <p:cNvPr id="20" name="Image 2" descr="bird4">    </p:cNvPr>
+          <p:cNvPr id="20" name="Image 2" descr="lady_beetle">    </p:cNvPr>
           <p:cNvPicPr>
             <a:picLocks noChangeAspect="1"/>
           </p:cNvPicPr>
@@ -23249,9 +23201,9 @@
           </a:stretch>
         </p:blipFill>
         <p:spPr>
-          <a:xfrm flipH="1">
-            <a:off x="5302057" y="45720"/>
-            <a:ext cx="1007303" cy="777240"/>
+          <a:xfrm>
+            <a:off x="5529011" y="45720"/>
+            <a:ext cx="780349" cy="777240"/>
           </a:xfrm>
           <a:prstGeom prst="rect">
             <a:avLst/>
@@ -24111,7 +24063,7 @@
       </p:sp>
       <p:pic>
         <p:nvPicPr>
-          <p:cNvPr id="19" name="Image 0" descr="turtle">    </p:cNvPr>
+          <p:cNvPr id="19" name="Image 0" descr="rooster">    </p:cNvPr>
           <p:cNvPicPr>
             <a:picLocks noChangeAspect="1"/>
           </p:cNvPicPr>
@@ -24124,9 +24076,9 @@
           </a:stretch>
         </p:blipFill>
         <p:spPr>
-          <a:xfrm>
-            <a:off x="91440" y="1783080"/>
-            <a:ext cx="1593342" cy="1554480"/>
+          <a:xfrm flipH="1">
+            <a:off x="91440" y="1828800"/>
+            <a:ext cx="1410371" cy="1463040"/>
           </a:xfrm>
           <a:prstGeom prst="rect">
             <a:avLst/>
@@ -24135,7 +24087,7 @@
       </p:pic>
       <p:pic>
         <p:nvPicPr>
-          <p:cNvPr id="20" name="Image 1" descr="duck">    </p:cNvPr>
+          <p:cNvPr id="20" name="Image 1" descr="turtle">    </p:cNvPr>
           <p:cNvPicPr>
             <a:picLocks noChangeAspect="1"/>
           </p:cNvPicPr>
@@ -24149,8 +24101,8 @@
         </p:blipFill>
         <p:spPr>
           <a:xfrm>
-            <a:off x="7925562" y="1783080"/>
-            <a:ext cx="1126998" cy="1554480"/>
+            <a:off x="6694140" y="1828800"/>
+            <a:ext cx="2358420" cy="1463040"/>
           </a:xfrm>
           <a:prstGeom prst="rect">
             <a:avLst/>
@@ -25069,7 +25021,7 @@
       </p:sp>
       <p:pic>
         <p:nvPicPr>
-          <p:cNvPr id="20" name="Image 0" descr="rabbit">    </p:cNvPr>
+          <p:cNvPr id="20" name="Image 0" descr="spouting_whale">    </p:cNvPr>
           <p:cNvPicPr>
             <a:picLocks noChangeAspect="1"/>
           </p:cNvPicPr>
@@ -25082,9 +25034,9 @@
           </a:stretch>
         </p:blipFill>
         <p:spPr>
-          <a:xfrm>
-            <a:off x="91440" y="3657600"/>
-            <a:ext cx="1060155" cy="1417320"/>
+          <a:xfrm flipH="1">
+            <a:off x="91440" y="3653028"/>
+            <a:ext cx="1342202" cy="1417320"/>
           </a:xfrm>
           <a:prstGeom prst="rect">
             <a:avLst/>
@@ -25093,7 +25045,7 @@
       </p:pic>
       <p:pic>
         <p:nvPicPr>
-          <p:cNvPr id="21" name="Image 1" descr="duck">    </p:cNvPr>
+          <p:cNvPr id="21" name="Image 1" descr="dolphin">    </p:cNvPr>
           <p:cNvPicPr>
             <a:picLocks noChangeAspect="1"/>
           </p:cNvPicPr>
@@ -25107,8 +25059,8 @@
         </p:blipFill>
         <p:spPr>
           <a:xfrm>
-            <a:off x="7934889" y="3520440"/>
-            <a:ext cx="1117671" cy="1554480"/>
+            <a:off x="7830739" y="3515868"/>
+            <a:ext cx="1221821" cy="1554480"/>
           </a:xfrm>
           <a:prstGeom prst="rect">
             <a:avLst/>
@@ -25117,7 +25069,7 @@
       </p:pic>
       <p:pic>
         <p:nvPicPr>
-          <p:cNvPr id="22" name="Image 2" descr="butterfly1">    </p:cNvPr>
+          <p:cNvPr id="22" name="Image 2" descr="dove">    </p:cNvPr>
           <p:cNvPicPr>
             <a:picLocks noChangeAspect="1"/>
           </p:cNvPicPr>
@@ -25131,8 +25083,8 @@
         </p:blipFill>
         <p:spPr>
           <a:xfrm>
-            <a:off x="6317498" y="45720"/>
-            <a:ext cx="906262" cy="777240"/>
+            <a:off x="6449629" y="45720"/>
+            <a:ext cx="774131" cy="777240"/>
           </a:xfrm>
           <a:prstGeom prst="rect">
             <a:avLst/>
@@ -26313,7 +26265,7 @@
       </p:sp>
       <p:pic>
         <p:nvPicPr>
-          <p:cNvPr id="28" name="Image 0" descr="bird1">    </p:cNvPr>
+          <p:cNvPr id="28" name="Image 0" descr="honeybee">    </p:cNvPr>
           <p:cNvPicPr>
             <a:picLocks noChangeAspect="1"/>
           </p:cNvPicPr>
@@ -26326,9 +26278,9 @@
           </a:stretch>
         </p:blipFill>
         <p:spPr>
-          <a:xfrm>
+          <a:xfrm flipH="1">
             <a:off x="1005840" y="45720"/>
-            <a:ext cx="1007303" cy="777240"/>
+            <a:ext cx="825429" cy="777240"/>
           </a:xfrm>
           <a:prstGeom prst="rect">
             <a:avLst/>
@@ -27436,7 +27388,7 @@
       </p:sp>
       <p:pic>
         <p:nvPicPr>
-          <p:cNvPr id="25" name="Image 0" descr="elephant">    </p:cNvPr>
+          <p:cNvPr id="25" name="Image 0" descr="lady_beetle">    </p:cNvPr>
           <p:cNvPicPr>
             <a:picLocks noChangeAspect="1"/>
           </p:cNvPicPr>
@@ -27450,32 +27402,8 @@
         </p:blipFill>
         <p:spPr>
           <a:xfrm>
-            <a:off x="91440" y="4251960"/>
-            <a:ext cx="906902" cy="822960"/>
-          </a:xfrm>
-          <a:prstGeom prst="rect">
-            <a:avLst/>
-          </a:prstGeom>
-        </p:spPr>
-      </p:pic>
-      <p:pic>
-        <p:nvPicPr>
-          <p:cNvPr id="26" name="Image 1" descr="bird4">    </p:cNvPr>
-          <p:cNvPicPr>
-            <a:picLocks noChangeAspect="1"/>
-          </p:cNvPicPr>
-          <p:nvPr/>
-        </p:nvPicPr>
-        <p:blipFill>
-          <a:blip r:embed="rId2"/>
-          <a:stretch>
-            <a:fillRect/>
-          </a:stretch>
-        </p:blipFill>
-        <p:spPr>
-          <a:xfrm flipH="1">
-            <a:off x="5479816" y="45720"/>
-            <a:ext cx="829544" cy="640080"/>
+            <a:off x="5529011" y="45720"/>
+            <a:ext cx="780349" cy="777240"/>
           </a:xfrm>
           <a:prstGeom prst="rect">
             <a:avLst/>
@@ -28456,7 +28384,7 @@
       </p:sp>
       <p:pic>
         <p:nvPicPr>
-          <p:cNvPr id="20" name="Image 0" descr="duck">    </p:cNvPr>
+          <p:cNvPr id="20" name="Image 0" descr="deer">    </p:cNvPr>
           <p:cNvPicPr>
             <a:picLocks noChangeAspect="1"/>
           </p:cNvPicPr>
@@ -28469,9 +28397,9 @@
           </a:stretch>
         </p:blipFill>
         <p:spPr>
-          <a:xfrm>
-            <a:off x="91440" y="3657600"/>
-            <a:ext cx="1197635" cy="1417320"/>
+          <a:xfrm flipH="1">
+            <a:off x="91440" y="3653028"/>
+            <a:ext cx="1417320" cy="1417320"/>
           </a:xfrm>
           <a:prstGeom prst="rect">
             <a:avLst/>
@@ -28480,7 +28408,7 @@
       </p:pic>
       <p:pic>
         <p:nvPicPr>
-          <p:cNvPr id="21" name="Image 1" descr="turtle">    </p:cNvPr>
+          <p:cNvPr id="21" name="Image 1" descr="elephant">    </p:cNvPr>
           <p:cNvPicPr>
             <a:picLocks noChangeAspect="1"/>
           </p:cNvPicPr>
@@ -28494,8 +28422,8 @@
         </p:blipFill>
         <p:spPr>
           <a:xfrm>
-            <a:off x="7446782" y="3520440"/>
-            <a:ext cx="1605778" cy="1554480"/>
+            <a:off x="7170085" y="3515868"/>
+            <a:ext cx="1882475" cy="1554480"/>
           </a:xfrm>
           <a:prstGeom prst="rect">
             <a:avLst/>
@@ -28504,7 +28432,7 @@
       </p:pic>
       <p:pic>
         <p:nvPicPr>
-          <p:cNvPr id="22" name="Image 2" descr="bee">    </p:cNvPr>
+          <p:cNvPr id="22" name="Image 2" descr="bird">    </p:cNvPr>
           <p:cNvPicPr>
             <a:picLocks noChangeAspect="1"/>
           </p:cNvPicPr>
@@ -28517,9 +28445,9 @@
           </a:stretch>
         </p:blipFill>
         <p:spPr>
-          <a:xfrm>
+          <a:xfrm flipH="1">
             <a:off x="1920240" y="45720"/>
-            <a:ext cx="802112" cy="777240"/>
+            <a:ext cx="742264" cy="777240"/>
           </a:xfrm>
           <a:prstGeom prst="rect">
             <a:avLst/>
@@ -29525,7 +29453,7 @@
       </p:sp>
       <p:pic>
         <p:nvPicPr>
-          <p:cNvPr id="21" name="Image 0" descr="dog">    </p:cNvPr>
+          <p:cNvPr id="21" name="Image 0" descr="goat">    </p:cNvPr>
           <p:cNvPicPr>
             <a:picLocks noChangeAspect="1"/>
           </p:cNvPicPr>
@@ -29539,8 +29467,8 @@
         </p:blipFill>
         <p:spPr>
           <a:xfrm>
-            <a:off x="91440" y="3931920"/>
-            <a:ext cx="1080135" cy="1143000"/>
+            <a:off x="91440" y="4064508"/>
+            <a:ext cx="1077255" cy="1005840"/>
           </a:xfrm>
           <a:prstGeom prst="rect">
             <a:avLst/>
@@ -29549,7 +29477,7 @@
       </p:pic>
       <p:pic>
         <p:nvPicPr>
-          <p:cNvPr id="22" name="Image 1" descr="turtle">    </p:cNvPr>
+          <p:cNvPr id="22" name="Image 1" descr="butterfly">    </p:cNvPr>
           <p:cNvPicPr>
             <a:picLocks noChangeAspect="1"/>
           </p:cNvPicPr>
@@ -29563,32 +29491,8 @@
         </p:blipFill>
         <p:spPr>
           <a:xfrm>
-            <a:off x="8356930" y="4297680"/>
-            <a:ext cx="695630" cy="777240"/>
-          </a:xfrm>
-          <a:prstGeom prst="rect">
-            <a:avLst/>
-          </a:prstGeom>
-        </p:spPr>
-      </p:pic>
-      <p:pic>
-        <p:nvPicPr>
-          <p:cNvPr id="23" name="Image 2" descr="bird2">    </p:cNvPr>
-          <p:cNvPicPr>
-            <a:picLocks noChangeAspect="1"/>
-          </p:cNvPicPr>
-          <p:nvPr/>
-        </p:nvPicPr>
-        <p:blipFill>
-          <a:blip r:embed="rId3"/>
-          <a:stretch>
-            <a:fillRect/>
-          </a:stretch>
-        </p:blipFill>
-        <p:spPr>
-          <a:xfrm flipH="1">
-            <a:off x="5333147" y="45720"/>
-            <a:ext cx="976213" cy="777240"/>
+            <a:off x="5532120" y="45720"/>
+            <a:ext cx="777240" cy="777240"/>
           </a:xfrm>
           <a:prstGeom prst="rect">
             <a:avLst/>
@@ -30619,7 +30523,7 @@
       </p:sp>
       <p:pic>
         <p:nvPicPr>
-          <p:cNvPr id="22" name="Image 0" descr="cat">    </p:cNvPr>
+          <p:cNvPr id="22" name="Image 0" descr="monkey">    </p:cNvPr>
           <p:cNvPicPr>
             <a:picLocks noChangeAspect="1"/>
           </p:cNvPicPr>
@@ -30633,8 +30537,8 @@
         </p:blipFill>
         <p:spPr>
           <a:xfrm>
-            <a:off x="91440" y="3657600"/>
-            <a:ext cx="1206139" cy="1417320"/>
+            <a:off x="91440" y="3653028"/>
+            <a:ext cx="1612910" cy="1417320"/>
           </a:xfrm>
           <a:prstGeom prst="rect">
             <a:avLst/>
@@ -30643,7 +30547,7 @@
       </p:pic>
       <p:pic>
         <p:nvPicPr>
-          <p:cNvPr id="23" name="Image 1" descr="turtle">    </p:cNvPr>
+          <p:cNvPr id="23" name="Image 1" descr="horse">    </p:cNvPr>
           <p:cNvPicPr>
             <a:picLocks noChangeAspect="1"/>
           </p:cNvPicPr>
@@ -30657,8 +30561,8 @@
         </p:blipFill>
         <p:spPr>
           <a:xfrm>
-            <a:off x="7283562" y="3520440"/>
-            <a:ext cx="1768998" cy="1554480"/>
+            <a:off x="7498080" y="3515868"/>
+            <a:ext cx="1554480" cy="1554480"/>
           </a:xfrm>
           <a:prstGeom prst="rect">
             <a:avLst/>
@@ -31777,7 +31681,7 @@
       </p:sp>
       <p:pic>
         <p:nvPicPr>
-          <p:cNvPr id="24" name="Image 0" descr="bird">    </p:cNvPr>
+          <p:cNvPr id="24" name="Image 0" descr="turtle">    </p:cNvPr>
           <p:cNvPicPr>
             <a:picLocks noChangeAspect="1"/>
           </p:cNvPicPr>
@@ -31790,9 +31694,9 @@
           </a:stretch>
         </p:blipFill>
         <p:spPr>
-          <a:xfrm>
-            <a:off x="91440" y="3566160"/>
-            <a:ext cx="1338270" cy="1508760"/>
+          <a:xfrm flipH="1">
+            <a:off x="91440" y="3561588"/>
+            <a:ext cx="2432121" cy="1508760"/>
           </a:xfrm>
           <a:prstGeom prst="rect">
             <a:avLst/>
@@ -31801,7 +31705,7 @@
       </p:pic>
       <p:pic>
         <p:nvPicPr>
-          <p:cNvPr id="25" name="Image 1" descr="duck">    </p:cNvPr>
+          <p:cNvPr id="25" name="Image 1" descr="tropical_fish">    </p:cNvPr>
           <p:cNvPicPr>
             <a:picLocks noChangeAspect="1"/>
           </p:cNvPicPr>
@@ -31815,8 +31719,8 @@
         </p:blipFill>
         <p:spPr>
           <a:xfrm>
-            <a:off x="7582753" y="3337560"/>
-            <a:ext cx="1469807" cy="1737360"/>
+            <a:off x="6938193" y="3332988"/>
+            <a:ext cx="2114367" cy="1737360"/>
           </a:xfrm>
           <a:prstGeom prst="rect">
             <a:avLst/>
@@ -31825,7 +31729,7 @@
       </p:pic>
       <p:pic>
         <p:nvPicPr>
-          <p:cNvPr id="26" name="Image 2" descr="bird1">    </p:cNvPr>
+          <p:cNvPr id="26" name="Image 2" descr="honeybee">    </p:cNvPr>
           <p:cNvPicPr>
             <a:picLocks noChangeAspect="1"/>
           </p:cNvPicPr>
@@ -31838,9 +31742,9 @@
           </a:stretch>
         </p:blipFill>
         <p:spPr>
-          <a:xfrm flipH="1">
-            <a:off x="6216457" y="45720"/>
-            <a:ext cx="1007303" cy="777240"/>
+          <a:xfrm>
+            <a:off x="6398331" y="45720"/>
+            <a:ext cx="825429" cy="777240"/>
           </a:xfrm>
           <a:prstGeom prst="rect">
             <a:avLst/>

--- a/kasrah-plus/01-alif.pptx
+++ b/kasrah-plus/01-alif.pptx
@@ -3430,7 +3430,7 @@
       </p:sp>
       <p:pic>
         <p:nvPicPr>
-          <p:cNvPr id="14" name="Image 0" descr="baby_chick">    </p:cNvPr>
+          <p:cNvPr id="14" name="Image 0" descr="kid">    </p:cNvPr>
           <p:cNvPicPr>
             <a:picLocks noChangeAspect="1"/>
           </p:cNvPicPr>
@@ -3443,9 +3443,9 @@
           </a:stretch>
         </p:blipFill>
         <p:spPr>
-          <a:xfrm flipH="1">
-            <a:off x="91440" y="1828800"/>
-            <a:ext cx="1575694" cy="1463040"/>
+          <a:xfrm>
+            <a:off x="91440" y="3241548"/>
+            <a:ext cx="837590" cy="1828800"/>
           </a:xfrm>
           <a:prstGeom prst="rect">
             <a:avLst/>
@@ -3454,7 +3454,7 @@
       </p:pic>
       <p:pic>
         <p:nvPicPr>
-          <p:cNvPr id="15" name="Image 1" descr="chipmunk">    </p:cNvPr>
+          <p:cNvPr id="15" name="Image 1" descr="kid">    </p:cNvPr>
           <p:cNvPicPr>
             <a:picLocks noChangeAspect="1"/>
           </p:cNvPicPr>
@@ -3468,32 +3468,8 @@
         </p:blipFill>
         <p:spPr>
           <a:xfrm>
-            <a:off x="7535388" y="1828800"/>
-            <a:ext cx="1517172" cy="1463040"/>
-          </a:xfrm>
-          <a:prstGeom prst="rect">
-            <a:avLst/>
-          </a:prstGeom>
-        </p:spPr>
-      </p:pic>
-      <p:pic>
-        <p:nvPicPr>
-          <p:cNvPr id="16" name="Image 2" descr="bird">    </p:cNvPr>
-          <p:cNvPicPr>
-            <a:picLocks noChangeAspect="1"/>
-          </p:cNvPicPr>
-          <p:nvPr/>
-        </p:nvPicPr>
-        <p:blipFill>
-          <a:blip r:embed="rId3"/>
-          <a:stretch>
-            <a:fillRect/>
-          </a:stretch>
-        </p:blipFill>
-        <p:spPr>
-          <a:xfrm>
-            <a:off x="5567096" y="45720"/>
-            <a:ext cx="742264" cy="777240"/>
+            <a:off x="8079821" y="1783080"/>
+            <a:ext cx="972739" cy="1645920"/>
           </a:xfrm>
           <a:prstGeom prst="rect">
             <a:avLst/>
@@ -4525,30 +4501,6 @@
           </a:p>
         </p:txBody>
       </p:sp>
-      <p:pic>
-        <p:nvPicPr>
-          <p:cNvPr id="32" name="Image 0" descr="lady_beetle">    </p:cNvPr>
-          <p:cNvPicPr>
-            <a:picLocks noChangeAspect="1"/>
-          </p:cNvPicPr>
-          <p:nvPr/>
-        </p:nvPicPr>
-        <p:blipFill>
-          <a:blip r:embed="rId1"/>
-          <a:stretch>
-            <a:fillRect/>
-          </a:stretch>
-        </p:blipFill>
-        <p:spPr>
-          <a:xfrm>
-            <a:off x="1005840" y="45720"/>
-            <a:ext cx="780349" cy="777240"/>
-          </a:xfrm>
-          <a:prstGeom prst="rect">
-            <a:avLst/>
-          </a:prstGeom>
-        </p:spPr>
-      </p:pic>
     </p:spTree>
   </p:cSld>
   <p:clrMapOvr>
@@ -5940,7 +5892,7 @@
       </p:sp>
       <p:pic>
         <p:nvPicPr>
-          <p:cNvPr id="29" name="Image 0" descr="flamingo">    </p:cNvPr>
+          <p:cNvPr id="29" name="Image 0" descr="kid">    </p:cNvPr>
           <p:cNvPicPr>
             <a:picLocks noChangeAspect="1"/>
           </p:cNvPicPr>
@@ -5953,33 +5905,9 @@
           </a:stretch>
         </p:blipFill>
         <p:spPr>
-          <a:xfrm flipH="1">
-            <a:off x="91440" y="3881628"/>
-            <a:ext cx="928390" cy="1188720"/>
-          </a:xfrm>
-          <a:prstGeom prst="rect">
-            <a:avLst/>
-          </a:prstGeom>
-        </p:spPr>
-      </p:pic>
-      <p:pic>
-        <p:nvPicPr>
-          <p:cNvPr id="30" name="Image 1" descr="bird">    </p:cNvPr>
-          <p:cNvPicPr>
-            <a:picLocks noChangeAspect="1"/>
-          </p:cNvPicPr>
-          <p:nvPr/>
-        </p:nvPicPr>
-        <p:blipFill>
-          <a:blip r:embed="rId2"/>
-          <a:stretch>
-            <a:fillRect/>
-          </a:stretch>
-        </p:blipFill>
-        <p:spPr>
-          <a:xfrm>
-            <a:off x="5567096" y="45720"/>
-            <a:ext cx="742264" cy="777240"/>
+          <a:xfrm>
+            <a:off x="91440" y="3561588"/>
+            <a:ext cx="811713" cy="1508760"/>
           </a:xfrm>
           <a:prstGeom prst="rect">
             <a:avLst/>
@@ -7250,7 +7178,7 @@
       </p:sp>
       <p:pic>
         <p:nvPicPr>
-          <p:cNvPr id="24" name="Image 0" descr="kangaroo">    </p:cNvPr>
+          <p:cNvPr id="24" name="Image 0" descr="animal">    </p:cNvPr>
           <p:cNvPicPr>
             <a:picLocks noChangeAspect="1"/>
           </p:cNvPicPr>
@@ -7265,7 +7193,7 @@
         <p:spPr>
           <a:xfrm>
             <a:off x="91440" y="3561588"/>
-            <a:ext cx="1617391" cy="1508760"/>
+            <a:ext cx="1984019" cy="1508760"/>
           </a:xfrm>
           <a:prstGeom prst="rect">
             <a:avLst/>
@@ -7274,7 +7202,7 @@
       </p:pic>
       <p:pic>
         <p:nvPicPr>
-          <p:cNvPr id="25" name="Image 1" descr="cat">    </p:cNvPr>
+          <p:cNvPr id="25" name="Image 1" descr="bird">    </p:cNvPr>
           <p:cNvPicPr>
             <a:picLocks noChangeAspect="1"/>
           </p:cNvPicPr>
@@ -7288,32 +7216,8 @@
         </p:blipFill>
         <p:spPr>
           <a:xfrm>
-            <a:off x="7250918" y="3332988"/>
-            <a:ext cx="1801642" cy="1737360"/>
-          </a:xfrm>
-          <a:prstGeom prst="rect">
-            <a:avLst/>
-          </a:prstGeom>
-        </p:spPr>
-      </p:pic>
-      <p:pic>
-        <p:nvPicPr>
-          <p:cNvPr id="26" name="Image 2" descr="butterfly">    </p:cNvPr>
-          <p:cNvPicPr>
-            <a:picLocks noChangeAspect="1"/>
-          </p:cNvPicPr>
-          <p:nvPr/>
-        </p:nvPicPr>
-        <p:blipFill>
-          <a:blip r:embed="rId3"/>
-          <a:stretch>
-            <a:fillRect/>
-          </a:stretch>
-        </p:blipFill>
-        <p:spPr>
-          <a:xfrm>
-            <a:off x="1920240" y="45720"/>
-            <a:ext cx="777240" cy="777240"/>
+            <a:off x="7502835" y="3332988"/>
+            <a:ext cx="1549725" cy="1737360"/>
           </a:xfrm>
           <a:prstGeom prst="rect">
             <a:avLst/>
@@ -8609,7 +8513,7 @@
       </p:sp>
       <p:pic>
         <p:nvPicPr>
-          <p:cNvPr id="25" name="Image 0" descr="rabbit">    </p:cNvPr>
+          <p:cNvPr id="25" name="Image 0" descr="kid">    </p:cNvPr>
           <p:cNvPicPr>
             <a:picLocks noChangeAspect="1"/>
           </p:cNvPicPr>
@@ -8622,9 +8526,9 @@
           </a:stretch>
         </p:blipFill>
         <p:spPr>
-          <a:xfrm flipH="1">
-            <a:off x="91440" y="3973068"/>
-            <a:ext cx="1101669" cy="1097280"/>
+          <a:xfrm>
+            <a:off x="91440" y="3561588"/>
+            <a:ext cx="777011" cy="1508760"/>
           </a:xfrm>
           <a:prstGeom prst="rect">
             <a:avLst/>
@@ -8633,7 +8537,7 @@
       </p:pic>
       <p:pic>
         <p:nvPicPr>
-          <p:cNvPr id="26" name="Image 1" descr="parrot">    </p:cNvPr>
+          <p:cNvPr id="26" name="Image 1" descr="kid">    </p:cNvPr>
           <p:cNvPicPr>
             <a:picLocks noChangeAspect="1"/>
           </p:cNvPicPr>
@@ -8647,32 +8551,8 @@
         </p:blipFill>
         <p:spPr>
           <a:xfrm>
-            <a:off x="8343168" y="4247388"/>
-            <a:ext cx="709392" cy="822960"/>
-          </a:xfrm>
-          <a:prstGeom prst="rect">
-            <a:avLst/>
-          </a:prstGeom>
-        </p:spPr>
-      </p:pic>
-      <p:pic>
-        <p:nvPicPr>
-          <p:cNvPr id="27" name="Image 2" descr="dove">    </p:cNvPr>
-          <p:cNvPicPr>
-            <a:picLocks noChangeAspect="1"/>
-          </p:cNvPicPr>
-          <p:nvPr/>
-        </p:nvPicPr>
-        <p:blipFill>
-          <a:blip r:embed="rId3"/>
-          <a:stretch>
-            <a:fillRect/>
-          </a:stretch>
-        </p:blipFill>
-        <p:spPr>
-          <a:xfrm>
-            <a:off x="5535229" y="45720"/>
-            <a:ext cx="774131" cy="777240"/>
+            <a:off x="8325475" y="3835908"/>
+            <a:ext cx="727085" cy="1234440"/>
           </a:xfrm>
           <a:prstGeom prst="rect">
             <a:avLst/>
@@ -9993,7 +9873,7 @@
       </p:sp>
       <p:pic>
         <p:nvPicPr>
-          <p:cNvPr id="26" name="Image 0" descr="camel">    </p:cNvPr>
+          <p:cNvPr id="26" name="Image 0" descr="animal">    </p:cNvPr>
           <p:cNvPicPr>
             <a:picLocks noChangeAspect="1"/>
           </p:cNvPicPr>
@@ -10006,9 +9886,9 @@
           </a:stretch>
         </p:blipFill>
         <p:spPr>
-          <a:xfrm flipH="1">
+          <a:xfrm>
             <a:off x="91440" y="3561588"/>
-            <a:ext cx="1564584" cy="1508760"/>
+            <a:ext cx="1741109" cy="1508760"/>
           </a:xfrm>
           <a:prstGeom prst="rect">
             <a:avLst/>
@@ -10017,7 +9897,7 @@
       </p:pic>
       <p:pic>
         <p:nvPicPr>
-          <p:cNvPr id="27" name="Image 1" descr="flamingo">    </p:cNvPr>
+          <p:cNvPr id="27" name="Image 1" descr="animal">    </p:cNvPr>
           <p:cNvPicPr>
             <a:picLocks noChangeAspect="1"/>
           </p:cNvPicPr>
@@ -10031,8 +9911,8 @@
         </p:blipFill>
         <p:spPr>
           <a:xfrm>
-            <a:off x="7695682" y="3332988"/>
-            <a:ext cx="1356878" cy="1737360"/>
+            <a:off x="5798485" y="3332988"/>
+            <a:ext cx="3254075" cy="1737360"/>
           </a:xfrm>
           <a:prstGeom prst="rect">
             <a:avLst/>
@@ -11313,7 +11193,7 @@
       </p:sp>
       <p:pic>
         <p:nvPicPr>
-          <p:cNvPr id="24" name="Image 0" descr="duck">    </p:cNvPr>
+          <p:cNvPr id="24" name="Image 0" descr="kid">    </p:cNvPr>
           <p:cNvPicPr>
             <a:picLocks noChangeAspect="1"/>
           </p:cNvPicPr>
@@ -11326,9 +11206,9 @@
           </a:stretch>
         </p:blipFill>
         <p:spPr>
-          <a:xfrm flipH="1">
+          <a:xfrm>
             <a:off x="91440" y="3561588"/>
-            <a:ext cx="1508760" cy="1508760"/>
+            <a:ext cx="724205" cy="1508760"/>
           </a:xfrm>
           <a:prstGeom prst="rect">
             <a:avLst/>
@@ -11337,7 +11217,7 @@
       </p:pic>
       <p:pic>
         <p:nvPicPr>
-          <p:cNvPr id="25" name="Image 1" descr="swan">    </p:cNvPr>
+          <p:cNvPr id="25" name="Image 1" descr="sea">    </p:cNvPr>
           <p:cNvPicPr>
             <a:picLocks noChangeAspect="1"/>
           </p:cNvPicPr>
@@ -11351,32 +11231,8 @@
         </p:blipFill>
         <p:spPr>
           <a:xfrm>
-            <a:off x="7181423" y="3332988"/>
-            <a:ext cx="1871137" cy="1737360"/>
-          </a:xfrm>
-          <a:prstGeom prst="rect">
-            <a:avLst/>
-          </a:prstGeom>
-        </p:spPr>
-      </p:pic>
-      <p:pic>
-        <p:nvPicPr>
-          <p:cNvPr id="26" name="Image 2" descr="lady_beetle">    </p:cNvPr>
-          <p:cNvPicPr>
-            <a:picLocks noChangeAspect="1"/>
-          </p:cNvPicPr>
-          <p:nvPr/>
-        </p:nvPicPr>
-        <p:blipFill>
-          <a:blip r:embed="rId3"/>
-          <a:stretch>
-            <a:fillRect/>
-          </a:stretch>
-        </p:blipFill>
-        <p:spPr>
-          <a:xfrm>
-            <a:off x="6443411" y="45720"/>
-            <a:ext cx="780349" cy="777240"/>
+            <a:off x="6476055" y="3332988"/>
+            <a:ext cx="2576505" cy="1737360"/>
           </a:xfrm>
           <a:prstGeom prst="rect">
             <a:avLst/>
@@ -12719,7 +12575,7 @@
       </p:sp>
       <p:pic>
         <p:nvPicPr>
-          <p:cNvPr id="28" name="Image 0" descr="bird">    </p:cNvPr>
+          <p:cNvPr id="28" name="Image 0" descr="kid">    </p:cNvPr>
           <p:cNvPicPr>
             <a:picLocks noChangeAspect="1"/>
           </p:cNvPicPr>
@@ -12732,9 +12588,9 @@
           </a:stretch>
         </p:blipFill>
         <p:spPr>
-          <a:xfrm flipH="1">
-            <a:off x="1005840" y="45720"/>
-            <a:ext cx="742264" cy="777240"/>
+          <a:xfrm>
+            <a:off x="8535192" y="2080260"/>
+            <a:ext cx="517368" cy="1051560"/>
           </a:xfrm>
           <a:prstGeom prst="rect">
             <a:avLst/>
@@ -13842,7 +13698,7 @@
       </p:sp>
       <p:pic>
         <p:nvPicPr>
-          <p:cNvPr id="25" name="Image 0" descr="peacock">    </p:cNvPr>
+          <p:cNvPr id="25" name="Image 0" descr="kid">    </p:cNvPr>
           <p:cNvPicPr>
             <a:picLocks noChangeAspect="1"/>
           </p:cNvPicPr>
@@ -13856,32 +13712,8 @@
         </p:blipFill>
         <p:spPr>
           <a:xfrm>
-            <a:off x="91440" y="4201668"/>
-            <a:ext cx="926882" cy="868680"/>
-          </a:xfrm>
-          <a:prstGeom prst="rect">
-            <a:avLst/>
-          </a:prstGeom>
-        </p:spPr>
-      </p:pic>
-      <p:pic>
-        <p:nvPicPr>
-          <p:cNvPr id="26" name="Image 1" descr="butterfly">    </p:cNvPr>
-          <p:cNvPicPr>
-            <a:picLocks noChangeAspect="1"/>
-          </p:cNvPicPr>
-          <p:nvPr/>
-        </p:nvPicPr>
-        <p:blipFill>
-          <a:blip r:embed="rId2"/>
-          <a:stretch>
-            <a:fillRect/>
-          </a:stretch>
-        </p:blipFill>
-        <p:spPr>
-          <a:xfrm>
-            <a:off x="5532120" y="45720"/>
-            <a:ext cx="777240" cy="777240"/>
+            <a:off x="91440" y="3653028"/>
+            <a:ext cx="901416" cy="1417320"/>
           </a:xfrm>
           <a:prstGeom prst="rect">
             <a:avLst/>
@@ -14862,7 +14694,7 @@
       </p:sp>
       <p:pic>
         <p:nvPicPr>
-          <p:cNvPr id="20" name="Image 0" descr="zebra">    </p:cNvPr>
+          <p:cNvPr id="20" name="Image 0" descr="animal">    </p:cNvPr>
           <p:cNvPicPr>
             <a:picLocks noChangeAspect="1"/>
           </p:cNvPicPr>
@@ -14877,7 +14709,7 @@
         <p:spPr>
           <a:xfrm>
             <a:off x="91440" y="3653028"/>
-            <a:ext cx="1417320" cy="1417320"/>
+            <a:ext cx="1540627" cy="1417320"/>
           </a:xfrm>
           <a:prstGeom prst="rect">
             <a:avLst/>
@@ -14886,7 +14718,7 @@
       </p:pic>
       <p:pic>
         <p:nvPicPr>
-          <p:cNvPr id="21" name="Image 1" descr="snail">    </p:cNvPr>
+          <p:cNvPr id="21" name="Image 1" descr="animal">    </p:cNvPr>
           <p:cNvPicPr>
             <a:picLocks noChangeAspect="1"/>
           </p:cNvPicPr>
@@ -14899,33 +14731,9 @@
           </a:stretch>
         </p:blipFill>
         <p:spPr>
-          <a:xfrm flipH="1">
-            <a:off x="7470099" y="3515868"/>
-            <a:ext cx="1582461" cy="1554480"/>
-          </a:xfrm>
-          <a:prstGeom prst="rect">
-            <a:avLst/>
-          </a:prstGeom>
-        </p:spPr>
-      </p:pic>
-      <p:pic>
-        <p:nvPicPr>
-          <p:cNvPr id="22" name="Image 2" descr="dove">    </p:cNvPr>
-          <p:cNvPicPr>
-            <a:picLocks noChangeAspect="1"/>
-          </p:cNvPicPr>
-          <p:nvPr/>
-        </p:nvPicPr>
-        <p:blipFill>
-          <a:blip r:embed="rId3"/>
-          <a:stretch>
-            <a:fillRect/>
-          </a:stretch>
-        </p:blipFill>
-        <p:spPr>
-          <a:xfrm flipH="1">
-            <a:off x="1920240" y="45720"/>
-            <a:ext cx="774131" cy="777240"/>
+          <a:xfrm>
+            <a:off x="7258690" y="3515868"/>
+            <a:ext cx="1793870" cy="1554480"/>
           </a:xfrm>
           <a:prstGeom prst="rect">
             <a:avLst/>
@@ -15931,7 +15739,7 @@
       </p:sp>
       <p:pic>
         <p:nvPicPr>
-          <p:cNvPr id="21" name="Image 0" descr="dog">    </p:cNvPr>
+          <p:cNvPr id="21" name="Image 0" descr="kid">    </p:cNvPr>
           <p:cNvPicPr>
             <a:picLocks noChangeAspect="1"/>
           </p:cNvPicPr>
@@ -15944,9 +15752,9 @@
           </a:stretch>
         </p:blipFill>
         <p:spPr>
-          <a:xfrm flipH="1">
-            <a:off x="91440" y="4110228"/>
-            <a:ext cx="1075334" cy="960120"/>
+          <a:xfrm>
+            <a:off x="91440" y="3653028"/>
+            <a:ext cx="701573" cy="1417320"/>
           </a:xfrm>
           <a:prstGeom prst="rect">
             <a:avLst/>
@@ -15955,7 +15763,7 @@
       </p:pic>
       <p:pic>
         <p:nvPicPr>
-          <p:cNvPr id="22" name="Image 1" descr="honeybee">    </p:cNvPr>
+          <p:cNvPr id="22" name="Image 1" descr="kid">    </p:cNvPr>
           <p:cNvPicPr>
             <a:picLocks noChangeAspect="1"/>
           </p:cNvPicPr>
@@ -15969,8 +15777,8 @@
         </p:blipFill>
         <p:spPr>
           <a:xfrm>
-            <a:off x="5483931" y="45720"/>
-            <a:ext cx="825429" cy="777240"/>
+            <a:off x="8353593" y="4110228"/>
+            <a:ext cx="698967" cy="960120"/>
           </a:xfrm>
           <a:prstGeom prst="rect">
             <a:avLst/>
@@ -17001,7 +16809,7 @@
       </p:sp>
       <p:pic>
         <p:nvPicPr>
-          <p:cNvPr id="22" name="Image 0" descr="duck">    </p:cNvPr>
+          <p:cNvPr id="22" name="Image 0" descr="animal">    </p:cNvPr>
           <p:cNvPicPr>
             <a:picLocks noChangeAspect="1"/>
           </p:cNvPicPr>
@@ -17014,9 +16822,9 @@
           </a:stretch>
         </p:blipFill>
         <p:spPr>
-          <a:xfrm flipH="1">
+          <a:xfrm>
             <a:off x="91440" y="3653028"/>
-            <a:ext cx="1417320" cy="1417320"/>
+            <a:ext cx="1474013" cy="1417320"/>
           </a:xfrm>
           <a:prstGeom prst="rect">
             <a:avLst/>
@@ -17025,7 +16833,7 @@
       </p:pic>
       <p:pic>
         <p:nvPicPr>
-          <p:cNvPr id="23" name="Image 1" descr="peacock">    </p:cNvPr>
+          <p:cNvPr id="23" name="Image 1" descr="bird">    </p:cNvPr>
           <p:cNvPicPr>
             <a:picLocks noChangeAspect="1"/>
           </p:cNvPicPr>
@@ -17039,8 +16847,8 @@
         </p:blipFill>
         <p:spPr>
           <a:xfrm>
-            <a:off x="7393930" y="3515868"/>
-            <a:ext cx="1658630" cy="1554480"/>
+            <a:off x="7302216" y="3515868"/>
+            <a:ext cx="1750344" cy="1554480"/>
           </a:xfrm>
           <a:prstGeom prst="rect">
             <a:avLst/>
@@ -18071,7 +17879,7 @@
       </p:sp>
       <p:pic>
         <p:nvPicPr>
-          <p:cNvPr id="22" name="Image 0" descr="hatching_chick">    </p:cNvPr>
+          <p:cNvPr id="22" name="Image 0" descr="animal">    </p:cNvPr>
           <p:cNvPicPr>
             <a:picLocks noChangeAspect="1"/>
           </p:cNvPicPr>
@@ -18086,7 +17894,7 @@
         <p:spPr>
           <a:xfrm>
             <a:off x="91440" y="3653028"/>
-            <a:ext cx="1417320" cy="1417320"/>
+            <a:ext cx="1267084" cy="1417320"/>
           </a:xfrm>
           <a:prstGeom prst="rect">
             <a:avLst/>
@@ -18095,7 +17903,7 @@
       </p:pic>
       <p:pic>
         <p:nvPicPr>
-          <p:cNvPr id="23" name="Image 1" descr="cow">    </p:cNvPr>
+          <p:cNvPr id="23" name="Image 1" descr="bird">    </p:cNvPr>
           <p:cNvPicPr>
             <a:picLocks noChangeAspect="1"/>
           </p:cNvPicPr>
@@ -18109,8 +17917,8 @@
         </p:blipFill>
         <p:spPr>
           <a:xfrm>
-            <a:off x="7409475" y="3515868"/>
-            <a:ext cx="1643085" cy="1554480"/>
+            <a:off x="7849392" y="3515868"/>
+            <a:ext cx="1203168" cy="1554480"/>
           </a:xfrm>
           <a:prstGeom prst="rect">
             <a:avLst/>
@@ -19101,7 +18909,7 @@
       </p:sp>
       <p:pic>
         <p:nvPicPr>
-          <p:cNvPr id="20" name="Image 0" descr="crab">    </p:cNvPr>
+          <p:cNvPr id="20" name="Image 0" descr="kid">    </p:cNvPr>
           <p:cNvPicPr>
             <a:picLocks noChangeAspect="1"/>
           </p:cNvPicPr>
@@ -19116,7 +18924,7 @@
         <p:spPr>
           <a:xfrm>
             <a:off x="91440" y="3653028"/>
-            <a:ext cx="1587398" cy="1417320"/>
+            <a:ext cx="729920" cy="1417320"/>
           </a:xfrm>
           <a:prstGeom prst="rect">
             <a:avLst/>
@@ -19125,7 +18933,7 @@
       </p:pic>
       <p:pic>
         <p:nvPicPr>
-          <p:cNvPr id="21" name="Image 1" descr="seal">    </p:cNvPr>
+          <p:cNvPr id="21" name="Image 1" descr="sea">    </p:cNvPr>
           <p:cNvPicPr>
             <a:picLocks noChangeAspect="1"/>
           </p:cNvPicPr>
@@ -19139,32 +18947,8 @@
         </p:blipFill>
         <p:spPr>
           <a:xfrm>
-            <a:off x="7000646" y="3515868"/>
-            <a:ext cx="2051914" cy="1554480"/>
-          </a:xfrm>
-          <a:prstGeom prst="rect">
-            <a:avLst/>
-          </a:prstGeom>
-        </p:spPr>
-      </p:pic>
-      <p:pic>
-        <p:nvPicPr>
-          <p:cNvPr id="22" name="Image 2" descr="bird">    </p:cNvPr>
-          <p:cNvPicPr>
-            <a:picLocks noChangeAspect="1"/>
-          </p:cNvPicPr>
-          <p:nvPr/>
-        </p:nvPicPr>
-        <p:blipFill>
-          <a:blip r:embed="rId3"/>
-          <a:stretch>
-            <a:fillRect/>
-          </a:stretch>
-        </p:blipFill>
-        <p:spPr>
-          <a:xfrm>
-            <a:off x="6481496" y="45720"/>
-            <a:ext cx="742264" cy="777240"/>
+            <a:off x="6372636" y="3515868"/>
+            <a:ext cx="2679924" cy="1554480"/>
           </a:xfrm>
           <a:prstGeom prst="rect">
             <a:avLst/>
@@ -20345,7 +20129,7 @@
       </p:sp>
       <p:pic>
         <p:nvPicPr>
-          <p:cNvPr id="28" name="Image 0" descr="butterfly">    </p:cNvPr>
+          <p:cNvPr id="28" name="Image 0" descr="kid">    </p:cNvPr>
           <p:cNvPicPr>
             <a:picLocks noChangeAspect="1"/>
           </p:cNvPicPr>
@@ -20359,8 +20143,8 @@
         </p:blipFill>
         <p:spPr>
           <a:xfrm>
-            <a:off x="1005840" y="45720"/>
-            <a:ext cx="777240" cy="777240"/>
+            <a:off x="8545068" y="2034540"/>
+            <a:ext cx="507492" cy="1143000"/>
           </a:xfrm>
           <a:prstGeom prst="rect">
             <a:avLst/>
@@ -21369,7 +21153,7 @@
       </p:sp>
       <p:pic>
         <p:nvPicPr>
-          <p:cNvPr id="22" name="Image 0" descr="cow">    </p:cNvPr>
+          <p:cNvPr id="22" name="Image 0" descr="kid">    </p:cNvPr>
           <p:cNvPicPr>
             <a:picLocks noChangeAspect="1"/>
           </p:cNvPicPr>
@@ -21382,9 +21166,9 @@
           </a:stretch>
         </p:blipFill>
         <p:spPr>
-          <a:xfrm flipH="1">
-            <a:off x="91440" y="1828800"/>
-            <a:ext cx="1546433" cy="1463040"/>
+          <a:xfrm>
+            <a:off x="91440" y="3287268"/>
+            <a:ext cx="921852" cy="1783080"/>
           </a:xfrm>
           <a:prstGeom prst="rect">
             <a:avLst/>
@@ -21393,7 +21177,7 @@
       </p:pic>
       <p:pic>
         <p:nvPicPr>
-          <p:cNvPr id="23" name="Image 1" descr="camel">    </p:cNvPr>
+          <p:cNvPr id="23" name="Image 1" descr="bird">    </p:cNvPr>
           <p:cNvPicPr>
             <a:picLocks noChangeAspect="1"/>
           </p:cNvPicPr>
@@ -21407,32 +21191,8 @@
         </p:blipFill>
         <p:spPr>
           <a:xfrm>
-            <a:off x="7535388" y="1828800"/>
-            <a:ext cx="1517172" cy="1463040"/>
-          </a:xfrm>
-          <a:prstGeom prst="rect">
-            <a:avLst/>
-          </a:prstGeom>
-        </p:spPr>
-      </p:pic>
-      <p:pic>
-        <p:nvPicPr>
-          <p:cNvPr id="24" name="Image 2" descr="dove">    </p:cNvPr>
-          <p:cNvPicPr>
-            <a:picLocks noChangeAspect="1"/>
-          </p:cNvPicPr>
-          <p:nvPr/>
-        </p:nvPicPr>
-        <p:blipFill>
-          <a:blip r:embed="rId3"/>
-          <a:stretch>
-            <a:fillRect/>
-          </a:stretch>
-        </p:blipFill>
-        <p:spPr>
-          <a:xfrm>
-            <a:off x="5535229" y="45720"/>
-            <a:ext cx="774131" cy="777240"/>
+            <a:off x="7800015" y="1783080"/>
+            <a:ext cx="1252545" cy="1645920"/>
           </a:xfrm>
           <a:prstGeom prst="rect">
             <a:avLst/>
@@ -22242,7 +22002,7 @@
       </p:sp>
       <p:pic>
         <p:nvPicPr>
-          <p:cNvPr id="17" name="Image 0" descr="giraffe">    </p:cNvPr>
+          <p:cNvPr id="17" name="Image 0" descr="animal">    </p:cNvPr>
           <p:cNvPicPr>
             <a:picLocks noChangeAspect="1"/>
           </p:cNvPicPr>
@@ -22255,9 +22015,9 @@
           </a:stretch>
         </p:blipFill>
         <p:spPr>
-          <a:xfrm flipH="1">
-            <a:off x="91440" y="1828800"/>
-            <a:ext cx="1372332" cy="1463040"/>
+          <a:xfrm>
+            <a:off x="91440" y="3241548"/>
+            <a:ext cx="1680667" cy="1828800"/>
           </a:xfrm>
           <a:prstGeom prst="rect">
             <a:avLst/>
@@ -22266,7 +22026,7 @@
       </p:pic>
       <p:pic>
         <p:nvPicPr>
-          <p:cNvPr id="18" name="Image 1" descr="owl">    </p:cNvPr>
+          <p:cNvPr id="18" name="Image 1" descr="bird">    </p:cNvPr>
           <p:cNvPicPr>
             <a:picLocks noChangeAspect="1"/>
           </p:cNvPicPr>
@@ -22280,32 +22040,8 @@
         </p:blipFill>
         <p:spPr>
           <a:xfrm>
-            <a:off x="7902611" y="1828800"/>
-            <a:ext cx="1149949" cy="1463040"/>
-          </a:xfrm>
-          <a:prstGeom prst="rect">
-            <a:avLst/>
-          </a:prstGeom>
-        </p:spPr>
-      </p:pic>
-      <p:pic>
-        <p:nvPicPr>
-          <p:cNvPr id="19" name="Image 2" descr="honeybee">    </p:cNvPr>
-          <p:cNvPicPr>
-            <a:picLocks noChangeAspect="1"/>
-          </p:cNvPicPr>
-          <p:nvPr/>
-        </p:nvPicPr>
-        <p:blipFill>
-          <a:blip r:embed="rId3"/>
-          <a:stretch>
-            <a:fillRect/>
-          </a:stretch>
-        </p:blipFill>
-        <p:spPr>
-          <a:xfrm flipH="1">
-            <a:off x="1920240" y="45720"/>
-            <a:ext cx="825429" cy="777240"/>
+            <a:off x="7616952" y="3241548"/>
+            <a:ext cx="1435608" cy="1828800"/>
           </a:xfrm>
           <a:prstGeom prst="rect">
             <a:avLst/>
@@ -23140,7 +22876,7 @@
       </p:sp>
       <p:pic>
         <p:nvPicPr>
-          <p:cNvPr id="18" name="Image 0" descr="llama">    </p:cNvPr>
+          <p:cNvPr id="18" name="Image 0" descr="kid">    </p:cNvPr>
           <p:cNvPicPr>
             <a:picLocks noChangeAspect="1"/>
           </p:cNvPicPr>
@@ -23153,9 +22889,9 @@
           </a:stretch>
         </p:blipFill>
         <p:spPr>
-          <a:xfrm flipH="1">
-            <a:off x="91440" y="1828800"/>
-            <a:ext cx="1365016" cy="1463040"/>
+          <a:xfrm>
+            <a:off x="91440" y="3241548"/>
+            <a:ext cx="852221" cy="1828800"/>
           </a:xfrm>
           <a:prstGeom prst="rect">
             <a:avLst/>
@@ -23164,7 +22900,7 @@
       </p:pic>
       <p:pic>
         <p:nvPicPr>
-          <p:cNvPr id="19" name="Image 1" descr="ewe">    </p:cNvPr>
+          <p:cNvPr id="19" name="Image 1" descr="kid">    </p:cNvPr>
           <p:cNvPicPr>
             <a:picLocks noChangeAspect="1"/>
           </p:cNvPicPr>
@@ -23178,32 +22914,8 @@
         </p:blipFill>
         <p:spPr>
           <a:xfrm>
-            <a:off x="7589520" y="1828800"/>
-            <a:ext cx="1463040" cy="1463040"/>
-          </a:xfrm>
-          <a:prstGeom prst="rect">
-            <a:avLst/>
-          </a:prstGeom>
-        </p:spPr>
-      </p:pic>
-      <p:pic>
-        <p:nvPicPr>
-          <p:cNvPr id="20" name="Image 2" descr="lady_beetle">    </p:cNvPr>
-          <p:cNvPicPr>
-            <a:picLocks noChangeAspect="1"/>
-          </p:cNvPicPr>
-          <p:nvPr/>
-        </p:nvPicPr>
-        <p:blipFill>
-          <a:blip r:embed="rId3"/>
-          <a:stretch>
-            <a:fillRect/>
-          </a:stretch>
-        </p:blipFill>
-        <p:spPr>
-          <a:xfrm>
-            <a:off x="5529011" y="45720"/>
-            <a:ext cx="780349" cy="777240"/>
+            <a:off x="8170347" y="1783080"/>
+            <a:ext cx="882213" cy="1645920"/>
           </a:xfrm>
           <a:prstGeom prst="rect">
             <a:avLst/>
@@ -24063,7 +23775,7 @@
       </p:sp>
       <p:pic>
         <p:nvPicPr>
-          <p:cNvPr id="19" name="Image 0" descr="rooster">    </p:cNvPr>
+          <p:cNvPr id="19" name="Image 0" descr="animal">    </p:cNvPr>
           <p:cNvPicPr>
             <a:picLocks noChangeAspect="1"/>
           </p:cNvPicPr>
@@ -24076,9 +23788,9 @@
           </a:stretch>
         </p:blipFill>
         <p:spPr>
-          <a:xfrm flipH="1">
-            <a:off x="91440" y="1828800"/>
-            <a:ext cx="1410371" cy="1463040"/>
+          <a:xfrm>
+            <a:off x="91440" y="3241548"/>
+            <a:ext cx="1410005" cy="1828800"/>
           </a:xfrm>
           <a:prstGeom prst="rect">
             <a:avLst/>
@@ -24087,7 +23799,7 @@
       </p:pic>
       <p:pic>
         <p:nvPicPr>
-          <p:cNvPr id="20" name="Image 1" descr="turtle">    </p:cNvPr>
+          <p:cNvPr id="20" name="Image 1" descr="animal">    </p:cNvPr>
           <p:cNvPicPr>
             <a:picLocks noChangeAspect="1"/>
           </p:cNvPicPr>
@@ -24101,8 +23813,8 @@
         </p:blipFill>
         <p:spPr>
           <a:xfrm>
-            <a:off x="6694140" y="1828800"/>
-            <a:ext cx="2358420" cy="1463040"/>
+            <a:off x="6704381" y="3241548"/>
+            <a:ext cx="2348179" cy="1828800"/>
           </a:xfrm>
           <a:prstGeom prst="rect">
             <a:avLst/>
@@ -25021,7 +24733,7 @@
       </p:sp>
       <p:pic>
         <p:nvPicPr>
-          <p:cNvPr id="20" name="Image 0" descr="spouting_whale">    </p:cNvPr>
+          <p:cNvPr id="20" name="Image 0" descr="kid">    </p:cNvPr>
           <p:cNvPicPr>
             <a:picLocks noChangeAspect="1"/>
           </p:cNvPicPr>
@@ -25034,9 +24746,9 @@
           </a:stretch>
         </p:blipFill>
         <p:spPr>
-          <a:xfrm flipH="1">
+          <a:xfrm>
             <a:off x="91440" y="3653028"/>
-            <a:ext cx="1342202" cy="1417320"/>
+            <a:ext cx="776691" cy="1417320"/>
           </a:xfrm>
           <a:prstGeom prst="rect">
             <a:avLst/>
@@ -25045,7 +24757,7 @@
       </p:pic>
       <p:pic>
         <p:nvPicPr>
-          <p:cNvPr id="21" name="Image 1" descr="dolphin">    </p:cNvPr>
+          <p:cNvPr id="21" name="Image 1" descr="sea">    </p:cNvPr>
           <p:cNvPicPr>
             <a:picLocks noChangeAspect="1"/>
           </p:cNvPicPr>
@@ -25059,32 +24771,8 @@
         </p:blipFill>
         <p:spPr>
           <a:xfrm>
-            <a:off x="7830739" y="3515868"/>
-            <a:ext cx="1221821" cy="1554480"/>
-          </a:xfrm>
-          <a:prstGeom prst="rect">
-            <a:avLst/>
-          </a:prstGeom>
-        </p:spPr>
-      </p:pic>
-      <p:pic>
-        <p:nvPicPr>
-          <p:cNvPr id="22" name="Image 2" descr="dove">    </p:cNvPr>
-          <p:cNvPicPr>
-            <a:picLocks noChangeAspect="1"/>
-          </p:cNvPicPr>
-          <p:nvPr/>
-        </p:nvPicPr>
-        <p:blipFill>
-          <a:blip r:embed="rId3"/>
-          <a:stretch>
-            <a:fillRect/>
-          </a:stretch>
-        </p:blipFill>
-        <p:spPr>
-          <a:xfrm>
-            <a:off x="6449629" y="45720"/>
-            <a:ext cx="774131" cy="777240"/>
+            <a:off x="6372636" y="3515868"/>
+            <a:ext cx="2679924" cy="1554480"/>
           </a:xfrm>
           <a:prstGeom prst="rect">
             <a:avLst/>
@@ -26265,7 +25953,7 @@
       </p:sp>
       <p:pic>
         <p:nvPicPr>
-          <p:cNvPr id="28" name="Image 0" descr="honeybee">    </p:cNvPr>
+          <p:cNvPr id="28" name="Image 0" descr="kid">    </p:cNvPr>
           <p:cNvPicPr>
             <a:picLocks noChangeAspect="1"/>
           </p:cNvPicPr>
@@ -26278,9 +25966,9 @@
           </a:stretch>
         </p:blipFill>
         <p:spPr>
-          <a:xfrm flipH="1">
-            <a:off x="1005840" y="45720"/>
-            <a:ext cx="825429" cy="777240"/>
+          <a:xfrm>
+            <a:off x="8542782" y="2034540"/>
+            <a:ext cx="509778" cy="1143000"/>
           </a:xfrm>
           <a:prstGeom prst="rect">
             <a:avLst/>
@@ -27388,7 +27076,7 @@
       </p:sp>
       <p:pic>
         <p:nvPicPr>
-          <p:cNvPr id="25" name="Image 0" descr="lady_beetle">    </p:cNvPr>
+          <p:cNvPr id="25" name="Image 0" descr="kid">    </p:cNvPr>
           <p:cNvPicPr>
             <a:picLocks noChangeAspect="1"/>
           </p:cNvPicPr>
@@ -27402,8 +27090,8 @@
         </p:blipFill>
         <p:spPr>
           <a:xfrm>
-            <a:off x="5529011" y="45720"/>
-            <a:ext cx="780349" cy="777240"/>
+            <a:off x="91440" y="3653028"/>
+            <a:ext cx="776691" cy="1417320"/>
           </a:xfrm>
           <a:prstGeom prst="rect">
             <a:avLst/>
@@ -28384,7 +28072,7 @@
       </p:sp>
       <p:pic>
         <p:nvPicPr>
-          <p:cNvPr id="20" name="Image 0" descr="deer">    </p:cNvPr>
+          <p:cNvPr id="20" name="Image 0" descr="animal">    </p:cNvPr>
           <p:cNvPicPr>
             <a:picLocks noChangeAspect="1"/>
           </p:cNvPicPr>
@@ -28397,9 +28085,9 @@
           </a:stretch>
         </p:blipFill>
         <p:spPr>
-          <a:xfrm flipH="1">
+          <a:xfrm>
             <a:off x="91440" y="3653028"/>
-            <a:ext cx="1417320" cy="1417320"/>
+            <a:ext cx="1439997" cy="1417320"/>
           </a:xfrm>
           <a:prstGeom prst="rect">
             <a:avLst/>
@@ -28408,7 +28096,7 @@
       </p:pic>
       <p:pic>
         <p:nvPicPr>
-          <p:cNvPr id="21" name="Image 1" descr="elephant">    </p:cNvPr>
+          <p:cNvPr id="21" name="Image 1" descr="animal">    </p:cNvPr>
           <p:cNvPicPr>
             <a:picLocks noChangeAspect="1"/>
           </p:cNvPicPr>
@@ -28422,32 +28110,8 @@
         </p:blipFill>
         <p:spPr>
           <a:xfrm>
-            <a:off x="7170085" y="3515868"/>
-            <a:ext cx="1882475" cy="1554480"/>
-          </a:xfrm>
-          <a:prstGeom prst="rect">
-            <a:avLst/>
-          </a:prstGeom>
-        </p:spPr>
-      </p:pic>
-      <p:pic>
-        <p:nvPicPr>
-          <p:cNvPr id="22" name="Image 2" descr="bird">    </p:cNvPr>
-          <p:cNvPicPr>
-            <a:picLocks noChangeAspect="1"/>
-          </p:cNvPicPr>
-          <p:nvPr/>
-        </p:nvPicPr>
-        <p:blipFill>
-          <a:blip r:embed="rId3"/>
-          <a:stretch>
-            <a:fillRect/>
-          </a:stretch>
-        </p:blipFill>
-        <p:spPr>
-          <a:xfrm flipH="1">
-            <a:off x="1920240" y="45720"/>
-            <a:ext cx="742264" cy="777240"/>
+            <a:off x="7255581" y="3515868"/>
+            <a:ext cx="1796979" cy="1554480"/>
           </a:xfrm>
           <a:prstGeom prst="rect">
             <a:avLst/>
@@ -29453,7 +29117,7 @@
       </p:sp>
       <p:pic>
         <p:nvPicPr>
-          <p:cNvPr id="21" name="Image 0" descr="goat">    </p:cNvPr>
+          <p:cNvPr id="21" name="Image 0" descr="kid">    </p:cNvPr>
           <p:cNvPicPr>
             <a:picLocks noChangeAspect="1"/>
           </p:cNvPicPr>
@@ -29467,8 +29131,8 @@
         </p:blipFill>
         <p:spPr>
           <a:xfrm>
-            <a:off x="91440" y="4064508"/>
-            <a:ext cx="1077255" cy="1005840"/>
+            <a:off x="91440" y="3653028"/>
+            <a:ext cx="783778" cy="1417320"/>
           </a:xfrm>
           <a:prstGeom prst="rect">
             <a:avLst/>
@@ -29477,7 +29141,7 @@
       </p:pic>
       <p:pic>
         <p:nvPicPr>
-          <p:cNvPr id="22" name="Image 1" descr="butterfly">    </p:cNvPr>
+          <p:cNvPr id="22" name="Image 1" descr="kid">    </p:cNvPr>
           <p:cNvPicPr>
             <a:picLocks noChangeAspect="1"/>
           </p:cNvPicPr>
@@ -29491,8 +29155,8 @@
         </p:blipFill>
         <p:spPr>
           <a:xfrm>
-            <a:off x="5532120" y="45720"/>
-            <a:ext cx="777240" cy="777240"/>
+            <a:off x="8331373" y="4064508"/>
+            <a:ext cx="721187" cy="1005840"/>
           </a:xfrm>
           <a:prstGeom prst="rect">
             <a:avLst/>
@@ -30523,7 +30187,7 @@
       </p:sp>
       <p:pic>
         <p:nvPicPr>
-          <p:cNvPr id="22" name="Image 0" descr="monkey">    </p:cNvPr>
+          <p:cNvPr id="22" name="Image 0" descr="animal">    </p:cNvPr>
           <p:cNvPicPr>
             <a:picLocks noChangeAspect="1"/>
           </p:cNvPicPr>
@@ -30538,7 +30202,7 @@
         <p:spPr>
           <a:xfrm>
             <a:off x="91440" y="3653028"/>
-            <a:ext cx="1612910" cy="1417320"/>
+            <a:ext cx="1476847" cy="1417320"/>
           </a:xfrm>
           <a:prstGeom prst="rect">
             <a:avLst/>
@@ -30547,7 +30211,7 @@
       </p:pic>
       <p:pic>
         <p:nvPicPr>
-          <p:cNvPr id="23" name="Image 1" descr="horse">    </p:cNvPr>
+          <p:cNvPr id="23" name="Image 1" descr="bird">    </p:cNvPr>
           <p:cNvPicPr>
             <a:picLocks noChangeAspect="1"/>
           </p:cNvPicPr>
@@ -30561,8 +30225,8 @@
         </p:blipFill>
         <p:spPr>
           <a:xfrm>
-            <a:off x="7498080" y="3515868"/>
-            <a:ext cx="1554480" cy="1554480"/>
+            <a:off x="7947325" y="3515868"/>
+            <a:ext cx="1105235" cy="1554480"/>
           </a:xfrm>
           <a:prstGeom prst="rect">
             <a:avLst/>
@@ -31681,7 +31345,7 @@
       </p:sp>
       <p:pic>
         <p:nvPicPr>
-          <p:cNvPr id="24" name="Image 0" descr="turtle">    </p:cNvPr>
+          <p:cNvPr id="24" name="Image 0" descr="kid">    </p:cNvPr>
           <p:cNvPicPr>
             <a:picLocks noChangeAspect="1"/>
           </p:cNvPicPr>
@@ -31694,9 +31358,9 @@
           </a:stretch>
         </p:blipFill>
         <p:spPr>
-          <a:xfrm flipH="1">
+          <a:xfrm>
             <a:off x="91440" y="3561588"/>
-            <a:ext cx="2432121" cy="1508760"/>
+            <a:ext cx="843397" cy="1508760"/>
           </a:xfrm>
           <a:prstGeom prst="rect">
             <a:avLst/>
@@ -31705,7 +31369,7 @@
       </p:pic>
       <p:pic>
         <p:nvPicPr>
-          <p:cNvPr id="25" name="Image 1" descr="tropical_fish">    </p:cNvPr>
+          <p:cNvPr id="25" name="Image 1" descr="sea">    </p:cNvPr>
           <p:cNvPicPr>
             <a:picLocks noChangeAspect="1"/>
           </p:cNvPicPr>
@@ -31719,32 +31383,8 @@
         </p:blipFill>
         <p:spPr>
           <a:xfrm>
-            <a:off x="6938193" y="3332988"/>
-            <a:ext cx="2114367" cy="1737360"/>
-          </a:xfrm>
-          <a:prstGeom prst="rect">
-            <a:avLst/>
-          </a:prstGeom>
-        </p:spPr>
-      </p:pic>
-      <p:pic>
-        <p:nvPicPr>
-          <p:cNvPr id="26" name="Image 2" descr="honeybee">    </p:cNvPr>
-          <p:cNvPicPr>
-            <a:picLocks noChangeAspect="1"/>
-          </p:cNvPicPr>
-          <p:nvPr/>
-        </p:nvPicPr>
-        <p:blipFill>
-          <a:blip r:embed="rId3"/>
-          <a:stretch>
-            <a:fillRect/>
-          </a:stretch>
-        </p:blipFill>
-        <p:spPr>
-          <a:xfrm>
-            <a:off x="6398331" y="45720"/>
-            <a:ext cx="825429" cy="777240"/>
+            <a:off x="7054596" y="3332988"/>
+            <a:ext cx="1997964" cy="1737360"/>
           </a:xfrm>
           <a:prstGeom prst="rect">
             <a:avLst/>

--- a/kasrah-plus/01-alif.pptx
+++ b/kasrah-plus/01-alif.pptx
@@ -3444,8 +3444,8 @@
         </p:blipFill>
         <p:spPr>
           <a:xfrm>
-            <a:off x="91440" y="3241548"/>
-            <a:ext cx="837590" cy="1828800"/>
+            <a:off x="91440" y="1783080"/>
+            <a:ext cx="748894" cy="1645920"/>
           </a:xfrm>
           <a:prstGeom prst="rect">
             <a:avLst/>
@@ -3468,8 +3468,8 @@
         </p:blipFill>
         <p:spPr>
           <a:xfrm>
-            <a:off x="8079821" y="1783080"/>
-            <a:ext cx="972739" cy="1645920"/>
+            <a:off x="8088051" y="1783080"/>
+            <a:ext cx="964509" cy="1645920"/>
           </a:xfrm>
           <a:prstGeom prst="rect">
             <a:avLst/>
@@ -5906,8 +5906,8 @@
         </p:blipFill>
         <p:spPr>
           <a:xfrm>
-            <a:off x="91440" y="3561588"/>
-            <a:ext cx="811713" cy="1508760"/>
+            <a:off x="91440" y="3744468"/>
+            <a:ext cx="654985" cy="1325880"/>
           </a:xfrm>
           <a:prstGeom prst="rect">
             <a:avLst/>
@@ -7192,8 +7192,8 @@
         </p:blipFill>
         <p:spPr>
           <a:xfrm>
-            <a:off x="91440" y="3561588"/>
-            <a:ext cx="1984019" cy="1508760"/>
+            <a:off x="91440" y="3927348"/>
+            <a:ext cx="1673352" cy="1143000"/>
           </a:xfrm>
           <a:prstGeom prst="rect">
             <a:avLst/>
@@ -7216,8 +7216,8 @@
         </p:blipFill>
         <p:spPr>
           <a:xfrm>
-            <a:off x="7502835" y="3332988"/>
-            <a:ext cx="1549725" cy="1737360"/>
+            <a:off x="7802072" y="3835908"/>
+            <a:ext cx="1250488" cy="1234440"/>
           </a:xfrm>
           <a:prstGeom prst="rect">
             <a:avLst/>
@@ -8527,8 +8527,8 @@
         </p:blipFill>
         <p:spPr>
           <a:xfrm>
-            <a:off x="91440" y="3561588"/>
-            <a:ext cx="777011" cy="1508760"/>
+            <a:off x="91440" y="3653028"/>
+            <a:ext cx="732754" cy="1417320"/>
           </a:xfrm>
           <a:prstGeom prst="rect">
             <a:avLst/>
@@ -8551,8 +8551,8 @@
         </p:blipFill>
         <p:spPr>
           <a:xfrm>
-            <a:off x="8325475" y="3835908"/>
-            <a:ext cx="727085" cy="1234440"/>
+            <a:off x="8342757" y="3835908"/>
+            <a:ext cx="709803" cy="1234440"/>
           </a:xfrm>
           <a:prstGeom prst="rect">
             <a:avLst/>
@@ -9888,7 +9888,7 @@
         <p:spPr>
           <a:xfrm>
             <a:off x="91440" y="3561588"/>
-            <a:ext cx="1741109" cy="1508760"/>
+            <a:ext cx="1300551" cy="1508760"/>
           </a:xfrm>
           <a:prstGeom prst="rect">
             <a:avLst/>
@@ -9897,7 +9897,7 @@
       </p:pic>
       <p:pic>
         <p:nvPicPr>
-          <p:cNvPr id="27" name="Image 1" descr="animal">    </p:cNvPr>
+          <p:cNvPr id="27" name="Image 1" descr="bird">    </p:cNvPr>
           <p:cNvPicPr>
             <a:picLocks noChangeAspect="1"/>
           </p:cNvPicPr>
@@ -9911,8 +9911,8 @@
         </p:blipFill>
         <p:spPr>
           <a:xfrm>
-            <a:off x="5798485" y="3332988"/>
-            <a:ext cx="3254075" cy="1737360"/>
+            <a:off x="7680960" y="3698748"/>
+            <a:ext cx="1371600" cy="1371600"/>
           </a:xfrm>
           <a:prstGeom prst="rect">
             <a:avLst/>
@@ -11207,8 +11207,8 @@
         </p:blipFill>
         <p:spPr>
           <a:xfrm>
-            <a:off x="91440" y="3561588"/>
-            <a:ext cx="724205" cy="1508760"/>
+            <a:off x="91440" y="3653028"/>
+            <a:ext cx="684566" cy="1417320"/>
           </a:xfrm>
           <a:prstGeom prst="rect">
             <a:avLst/>
@@ -11231,8 +11231,8 @@
         </p:blipFill>
         <p:spPr>
           <a:xfrm>
-            <a:off x="6476055" y="3332988"/>
-            <a:ext cx="2576505" cy="1737360"/>
+            <a:off x="7557653" y="3835908"/>
+            <a:ext cx="1494907" cy="1234440"/>
           </a:xfrm>
           <a:prstGeom prst="rect">
             <a:avLst/>
@@ -12589,8 +12589,8 @@
         </p:blipFill>
         <p:spPr>
           <a:xfrm>
-            <a:off x="8535192" y="2080260"/>
-            <a:ext cx="517368" cy="1051560"/>
+            <a:off x="8552017" y="2080260"/>
+            <a:ext cx="500543" cy="1051560"/>
           </a:xfrm>
           <a:prstGeom prst="rect">
             <a:avLst/>
@@ -13712,8 +13712,8 @@
         </p:blipFill>
         <p:spPr>
           <a:xfrm>
-            <a:off x="91440" y="3653028"/>
-            <a:ext cx="901416" cy="1417320"/>
+            <a:off x="91440" y="3698748"/>
+            <a:ext cx="903884" cy="1371600"/>
           </a:xfrm>
           <a:prstGeom prst="rect">
             <a:avLst/>
@@ -14709,7 +14709,7 @@
         <p:spPr>
           <a:xfrm>
             <a:off x="91440" y="3653028"/>
-            <a:ext cx="1540627" cy="1417320"/>
+            <a:ext cx="1183462" cy="1417320"/>
           </a:xfrm>
           <a:prstGeom prst="rect">
             <a:avLst/>
@@ -14718,7 +14718,7 @@
       </p:pic>
       <p:pic>
         <p:nvPicPr>
-          <p:cNvPr id="21" name="Image 1" descr="animal">    </p:cNvPr>
+          <p:cNvPr id="21" name="Image 1" descr="bird">    </p:cNvPr>
           <p:cNvPicPr>
             <a:picLocks noChangeAspect="1"/>
           </p:cNvPicPr>
@@ -14732,8 +14732,8 @@
         </p:blipFill>
         <p:spPr>
           <a:xfrm>
-            <a:off x="7258690" y="3515868"/>
-            <a:ext cx="1793870" cy="1554480"/>
+            <a:off x="7439147" y="3835908"/>
+            <a:ext cx="1613413" cy="1234440"/>
           </a:xfrm>
           <a:prstGeom prst="rect">
             <a:avLst/>
@@ -15754,7 +15754,7 @@
         <p:spPr>
           <a:xfrm>
             <a:off x="91440" y="3653028"/>
-            <a:ext cx="701573" cy="1417320"/>
+            <a:ext cx="749762" cy="1417320"/>
           </a:xfrm>
           <a:prstGeom prst="rect">
             <a:avLst/>
@@ -15777,8 +15777,8 @@
         </p:blipFill>
         <p:spPr>
           <a:xfrm>
-            <a:off x="8353593" y="4110228"/>
-            <a:ext cx="698967" cy="960120"/>
+            <a:off x="8353044" y="4155948"/>
+            <a:ext cx="699516" cy="914400"/>
           </a:xfrm>
           <a:prstGeom prst="rect">
             <a:avLst/>
@@ -16823,8 +16823,8 @@
         </p:blipFill>
         <p:spPr>
           <a:xfrm>
-            <a:off x="91440" y="3653028"/>
-            <a:ext cx="1474013" cy="1417320"/>
+            <a:off x="91440" y="3835908"/>
+            <a:ext cx="1618351" cy="1234440"/>
           </a:xfrm>
           <a:prstGeom prst="rect">
             <a:avLst/>
@@ -16847,8 +16847,8 @@
         </p:blipFill>
         <p:spPr>
           <a:xfrm>
-            <a:off x="7302216" y="3515868"/>
-            <a:ext cx="1750344" cy="1554480"/>
+            <a:off x="7780995" y="3515868"/>
+            <a:ext cx="1271565" cy="1554480"/>
           </a:xfrm>
           <a:prstGeom prst="rect">
             <a:avLst/>
@@ -17893,8 +17893,8 @@
         </p:blipFill>
         <p:spPr>
           <a:xfrm>
-            <a:off x="91440" y="3653028"/>
-            <a:ext cx="1267084" cy="1417320"/>
+            <a:off x="91440" y="3927348"/>
+            <a:ext cx="1739646" cy="1143000"/>
           </a:xfrm>
           <a:prstGeom prst="rect">
             <a:avLst/>
@@ -17917,8 +17917,8 @@
         </p:blipFill>
         <p:spPr>
           <a:xfrm>
-            <a:off x="7849392" y="3515868"/>
-            <a:ext cx="1203168" cy="1554480"/>
+            <a:off x="7872527" y="3744468"/>
+            <a:ext cx="1180033" cy="1325880"/>
           </a:xfrm>
           <a:prstGeom prst="rect">
             <a:avLst/>
@@ -18924,7 +18924,7 @@
         <p:spPr>
           <a:xfrm>
             <a:off x="91440" y="3653028"/>
-            <a:ext cx="729920" cy="1417320"/>
+            <a:ext cx="717164" cy="1417320"/>
           </a:xfrm>
           <a:prstGeom prst="rect">
             <a:avLst/>
@@ -18947,8 +18947,8 @@
         </p:blipFill>
         <p:spPr>
           <a:xfrm>
-            <a:off x="6372636" y="3515868"/>
-            <a:ext cx="2679924" cy="1554480"/>
+            <a:off x="7452223" y="3744468"/>
+            <a:ext cx="1600337" cy="1325880"/>
           </a:xfrm>
           <a:prstGeom prst="rect">
             <a:avLst/>
@@ -20143,8 +20143,8 @@
         </p:blipFill>
         <p:spPr>
           <a:xfrm>
-            <a:off x="8545068" y="2034540"/>
-            <a:ext cx="507492" cy="1143000"/>
+            <a:off x="8547354" y="2011680"/>
+            <a:ext cx="505206" cy="1188720"/>
           </a:xfrm>
           <a:prstGeom prst="rect">
             <a:avLst/>
@@ -21167,8 +21167,8 @@
         </p:blipFill>
         <p:spPr>
           <a:xfrm>
-            <a:off x="91440" y="3287268"/>
-            <a:ext cx="921852" cy="1783080"/>
+            <a:off x="91440" y="3378708"/>
+            <a:ext cx="845820" cy="1691640"/>
           </a:xfrm>
           <a:prstGeom prst="rect">
             <a:avLst/>
@@ -21191,8 +21191,8 @@
         </p:blipFill>
         <p:spPr>
           <a:xfrm>
-            <a:off x="7800015" y="1783080"/>
-            <a:ext cx="1252545" cy="1645920"/>
+            <a:off x="7969545" y="1965960"/>
+            <a:ext cx="1083015" cy="1280160"/>
           </a:xfrm>
           <a:prstGeom prst="rect">
             <a:avLst/>
@@ -22016,8 +22016,8 @@
         </p:blipFill>
         <p:spPr>
           <a:xfrm>
-            <a:off x="91440" y="3241548"/>
-            <a:ext cx="1680667" cy="1828800"/>
+            <a:off x="91440" y="1920240"/>
+            <a:ext cx="1322222" cy="1371600"/>
           </a:xfrm>
           <a:prstGeom prst="rect">
             <a:avLst/>
@@ -22026,7 +22026,7 @@
       </p:pic>
       <p:pic>
         <p:nvPicPr>
-          <p:cNvPr id="18" name="Image 1" descr="bird">    </p:cNvPr>
+          <p:cNvPr id="18" name="Image 1" descr="animal">    </p:cNvPr>
           <p:cNvPicPr>
             <a:picLocks noChangeAspect="1"/>
           </p:cNvPicPr>
@@ -22040,8 +22040,8 @@
         </p:blipFill>
         <p:spPr>
           <a:xfrm>
-            <a:off x="7616952" y="3241548"/>
-            <a:ext cx="1435608" cy="1828800"/>
+            <a:off x="7645298" y="3332988"/>
+            <a:ext cx="1407262" cy="1737360"/>
           </a:xfrm>
           <a:prstGeom prst="rect">
             <a:avLst/>
@@ -22890,8 +22890,8 @@
         </p:blipFill>
         <p:spPr>
           <a:xfrm>
-            <a:off x="91440" y="3241548"/>
-            <a:ext cx="852221" cy="1828800"/>
+            <a:off x="91440" y="1783080"/>
+            <a:ext cx="748894" cy="1645920"/>
           </a:xfrm>
           <a:prstGeom prst="rect">
             <a:avLst/>
@@ -22914,8 +22914,8 @@
         </p:blipFill>
         <p:spPr>
           <a:xfrm>
-            <a:off x="8170347" y="1783080"/>
-            <a:ext cx="882213" cy="1645920"/>
+            <a:off x="8120969" y="1783080"/>
+            <a:ext cx="931591" cy="1645920"/>
           </a:xfrm>
           <a:prstGeom prst="rect">
             <a:avLst/>
@@ -23789,8 +23789,8 @@
         </p:blipFill>
         <p:spPr>
           <a:xfrm>
-            <a:off x="91440" y="3241548"/>
-            <a:ext cx="1410005" cy="1828800"/>
+            <a:off x="91440" y="1851660"/>
+            <a:ext cx="1309604" cy="1508760"/>
           </a:xfrm>
           <a:prstGeom prst="rect">
             <a:avLst/>
@@ -23813,8 +23813,8 @@
         </p:blipFill>
         <p:spPr>
           <a:xfrm>
-            <a:off x="6704381" y="3241548"/>
-            <a:ext cx="2348179" cy="1828800"/>
+            <a:off x="7751460" y="1988820"/>
+            <a:ext cx="1301100" cy="1234440"/>
           </a:xfrm>
           <a:prstGeom prst="rect">
             <a:avLst/>
@@ -24747,8 +24747,8 @@
         </p:blipFill>
         <p:spPr>
           <a:xfrm>
-            <a:off x="91440" y="3653028"/>
-            <a:ext cx="776691" cy="1417320"/>
+            <a:off x="91440" y="3744468"/>
+            <a:ext cx="719953" cy="1325880"/>
           </a:xfrm>
           <a:prstGeom prst="rect">
             <a:avLst/>
@@ -24771,8 +24771,8 @@
         </p:blipFill>
         <p:spPr>
           <a:xfrm>
-            <a:off x="6372636" y="3515868"/>
-            <a:ext cx="2679924" cy="1554480"/>
+            <a:off x="8094452" y="3881628"/>
+            <a:ext cx="958108" cy="1188720"/>
           </a:xfrm>
           <a:prstGeom prst="rect">
             <a:avLst/>
@@ -25967,8 +25967,8 @@
         </p:blipFill>
         <p:spPr>
           <a:xfrm>
-            <a:off x="8542782" y="2034540"/>
-            <a:ext cx="509778" cy="1143000"/>
+            <a:off x="8547354" y="2034540"/>
+            <a:ext cx="505206" cy="1143000"/>
           </a:xfrm>
           <a:prstGeom prst="rect">
             <a:avLst/>
@@ -27090,8 +27090,8 @@
         </p:blipFill>
         <p:spPr>
           <a:xfrm>
-            <a:off x="91440" y="3653028"/>
-            <a:ext cx="776691" cy="1417320"/>
+            <a:off x="91440" y="3744468"/>
+            <a:ext cx="688132" cy="1325880"/>
           </a:xfrm>
           <a:prstGeom prst="rect">
             <a:avLst/>
@@ -28087,7 +28087,7 @@
         <p:spPr>
           <a:xfrm>
             <a:off x="91440" y="3653028"/>
-            <a:ext cx="1439997" cy="1417320"/>
+            <a:ext cx="1267084" cy="1417320"/>
           </a:xfrm>
           <a:prstGeom prst="rect">
             <a:avLst/>
@@ -28110,8 +28110,8 @@
         </p:blipFill>
         <p:spPr>
           <a:xfrm>
-            <a:off x="7255581" y="3515868"/>
-            <a:ext cx="1796979" cy="1554480"/>
+            <a:off x="7626462" y="3790188"/>
+            <a:ext cx="1426098" cy="1280160"/>
           </a:xfrm>
           <a:prstGeom prst="rect">
             <a:avLst/>
@@ -29131,8 +29131,8 @@
         </p:blipFill>
         <p:spPr>
           <a:xfrm>
-            <a:off x="91440" y="3653028"/>
-            <a:ext cx="783778" cy="1417320"/>
+            <a:off x="91440" y="3744468"/>
+            <a:ext cx="694761" cy="1325880"/>
           </a:xfrm>
           <a:prstGeom prst="rect">
             <a:avLst/>
@@ -29155,8 +29155,8 @@
         </p:blipFill>
         <p:spPr>
           <a:xfrm>
-            <a:off x="8331373" y="4064508"/>
-            <a:ext cx="721187" cy="1005840"/>
+            <a:off x="8325749" y="4110228"/>
+            <a:ext cx="726811" cy="960120"/>
           </a:xfrm>
           <a:prstGeom prst="rect">
             <a:avLst/>
@@ -30201,8 +30201,8 @@
         </p:blipFill>
         <p:spPr>
           <a:xfrm>
-            <a:off x="91440" y="3653028"/>
-            <a:ext cx="1476847" cy="1417320"/>
+            <a:off x="91440" y="3698748"/>
+            <a:ext cx="1012241" cy="1371600"/>
           </a:xfrm>
           <a:prstGeom prst="rect">
             <a:avLst/>
@@ -30211,7 +30211,7 @@
       </p:pic>
       <p:pic>
         <p:nvPicPr>
-          <p:cNvPr id="23" name="Image 1" descr="bird">    </p:cNvPr>
+          <p:cNvPr id="23" name="Image 1" descr="animal">    </p:cNvPr>
           <p:cNvPicPr>
             <a:picLocks noChangeAspect="1"/>
           </p:cNvPicPr>
@@ -30225,8 +30225,8 @@
         </p:blipFill>
         <p:spPr>
           <a:xfrm>
-            <a:off x="7947325" y="3515868"/>
-            <a:ext cx="1105235" cy="1554480"/>
+            <a:off x="7751460" y="3653028"/>
+            <a:ext cx="1301100" cy="1417320"/>
           </a:xfrm>
           <a:prstGeom prst="rect">
             <a:avLst/>
@@ -31359,8 +31359,8 @@
         </p:blipFill>
         <p:spPr>
           <a:xfrm>
-            <a:off x="91440" y="3561588"/>
-            <a:ext cx="843397" cy="1508760"/>
+            <a:off x="91440" y="3744468"/>
+            <a:ext cx="769010" cy="1325880"/>
           </a:xfrm>
           <a:prstGeom prst="rect">
             <a:avLst/>
@@ -31383,8 +31383,8 @@
         </p:blipFill>
         <p:spPr>
           <a:xfrm>
-            <a:off x="7054596" y="3332988"/>
-            <a:ext cx="1997964" cy="1737360"/>
+            <a:off x="7446234" y="4064508"/>
+            <a:ext cx="1606326" cy="1005840"/>
           </a:xfrm>
           <a:prstGeom prst="rect">
             <a:avLst/>

--- a/kasrah-plus/01-alif.pptx
+++ b/kasrah-plus/01-alif.pptx
@@ -4,6 +4,9 @@
   <p:sldMasterIdLst>
     <p:sldMasterId id="2147483648" r:id="rId1"/>
   </p:sldMasterIdLst>
+  <p:notesMasterIdLst>
+    <p:notesMasterId r:id="rId28"/>
+  </p:notesMasterIdLst>
   <p:sldIdLst>
     <p:sldId id="256" r:id="rId2"/>
     <p:sldId id="257" r:id="rId3"/>
@@ -32,9 +35,6 @@
     <p:sldId id="280" r:id="rId26"/>
     <p:sldId id="281" r:id="rId27"/>
   </p:sldIdLst>
-  <p:notesMasterIdLst>
-    <p:notesMasterId r:id="rId28"/>
-  </p:notesMasterIdLst>
   <p:sldSz cx="9144000" cy="5143500"/>
   <p:notesSz cx="5143500" cy="9144000"/>
   <p:defaultTextStyle>
